--- a/Demonstrations/Presentations/De_Novo_Binder_Generation/De_Novo_Binder_Skeleton.pptx
+++ b/Demonstrations/Presentations/De_Novo_Binder_Generation/De_Novo_Binder_Skeleton.pptx
@@ -29,6 +29,45 @@
     <p:sldId id="277" r:id="rId28"/>
     <p:sldId id="278" r:id="rId29"/>
     <p:sldId id="279" r:id="rId30"/>
+    <p:sldId id="280" r:id="rId31"/>
+    <p:sldId id="281" r:id="rId32"/>
+    <p:sldId id="282" r:id="rId33"/>
+    <p:sldId id="283" r:id="rId34"/>
+    <p:sldId id="284" r:id="rId35"/>
+    <p:sldId id="285" r:id="rId36"/>
+    <p:sldId id="286" r:id="rId37"/>
+    <p:sldId id="287" r:id="rId38"/>
+    <p:sldId id="288" r:id="rId39"/>
+    <p:sldId id="289" r:id="rId40"/>
+    <p:sldId id="290" r:id="rId41"/>
+    <p:sldId id="291" r:id="rId42"/>
+    <p:sldId id="292" r:id="rId43"/>
+    <p:sldId id="293" r:id="rId44"/>
+    <p:sldId id="294" r:id="rId45"/>
+    <p:sldId id="295" r:id="rId46"/>
+    <p:sldId id="296" r:id="rId47"/>
+    <p:sldId id="297" r:id="rId48"/>
+    <p:sldId id="298" r:id="rId49"/>
+    <p:sldId id="299" r:id="rId50"/>
+    <p:sldId id="300" r:id="rId51"/>
+    <p:sldId id="301" r:id="rId52"/>
+    <p:sldId id="302" r:id="rId53"/>
+    <p:sldId id="303" r:id="rId54"/>
+    <p:sldId id="304" r:id="rId55"/>
+    <p:sldId id="305" r:id="rId56"/>
+    <p:sldId id="306" r:id="rId57"/>
+    <p:sldId id="307" r:id="rId58"/>
+    <p:sldId id="308" r:id="rId59"/>
+    <p:sldId id="309" r:id="rId60"/>
+    <p:sldId id="310" r:id="rId61"/>
+    <p:sldId id="311" r:id="rId62"/>
+    <p:sldId id="312" r:id="rId63"/>
+    <p:sldId id="313" r:id="rId64"/>
+    <p:sldId id="314" r:id="rId65"/>
+    <p:sldId id="315" r:id="rId66"/>
+    <p:sldId id="316" r:id="rId67"/>
+    <p:sldId id="317" r:id="rId68"/>
+    <p:sldId id="318" r:id="rId69"/>
   </p:sldIdLst>
   <p:sldSz cx="12191695" cy="6858000" type="screen4x3"/>
   <p:notesSz cx="6858000" cy="9144000"/>
@@ -3146,7 +3185,43 @@
           <a:p>
             <a:pPr/>
             <a:r>
-              <a:t>layout: center</a:t>
+              <a:t>theme: seriph</a:t>
+            </a:r>
+          </a:p>
+          <a:p>
+            <a:pPr/>
+            <a:r>
+              <a:t>background: '#0f172a'</a:t>
+            </a:r>
+          </a:p>
+          <a:p>
+            <a:pPr/>
+            <a:r>
+              <a:t>title: "De Novo Binder Generation"</a:t>
+            </a:r>
+          </a:p>
+          <a:p>
+            <a:pPr/>
+            <a:r>
+              <a:t>info: |</a:t>
+            </a:r>
+          </a:p>
+          <a:p>
+            <a:pPr/>
+            <a:r>
+              <a:t>## De Novo Protein Prediction to Binding Evaluation</a:t>
+            </a:r>
+          </a:p>
+          <a:p>
+            <a:pPr/>
+            <a:r>
+              <a:t>Engineering MMP9-selective TIMP3 loop variants via generative deep learning.</a:t>
+            </a:r>
+          </a:p>
+          <a:p>
+            <a:pPr/>
+            <a:r>
+              <a:t>Author: Ryan Gustafson | University of Nevada, Reno</a:t>
             </a:r>
           </a:p>
           <a:p>
@@ -3158,7 +3233,25 @@
           <a:p>
             <a:pPr/>
             <a:r>
-              <a:t>transition: fade-out</a:t>
+              <a:t>drawings:</a:t>
+            </a:r>
+          </a:p>
+          <a:p>
+            <a:pPr/>
+            <a:r>
+              <a:t>persist: false</a:t>
+            </a:r>
+          </a:p>
+          <a:p>
+            <a:pPr/>
+            <a:r>
+              <a:t>transition: slide-left</a:t>
+            </a:r>
+          </a:p>
+          <a:p>
+            <a:pPr/>
+            <a:r>
+              <a:t>mdc: true</a:t>
             </a:r>
           </a:p>
         </p:txBody>
@@ -3197,7 +3290,7 @@
           <a:lstStyle/>
           <a:p>
             <a:r>
-              <a:t>Sequence Optimization &amp; Metrics</a:t>
+              <a:t>Pipeline Phase Detail</a:t>
             </a:r>
           </a:p>
         </p:txBody>
@@ -3220,49 +3313,67 @@
           <a:p>
             <a:pPr/>
             <a:r>
-              <a:t>Ranking design confidence via ProteinMPNN and AlphaFold Z-Scores.</a:t>
-            </a:r>
-          </a:p>
-          <a:p>
-            <a:pPr/>
-            <a:r>
-              <a:t>Final Twist Ordered Library (Dec 2025)</a:t>
-            </a:r>
-          </a:p>
-          <a:p>
-            <a:pPr/>
-            <a:r>
-              <a:t>Consensus Selection Logic</a:t>
-            </a:r>
-          </a:p>
-          <a:p>
-            <a:pPr/>
-            <a:r>
-              <a:t>To minimize false positives, we employed a multi-dimensional consensus filter. Candidates were ranked across independent metrics for interface confidence (iPTM), local loop stability (LpLDDT), and distance consistency (PAE).</a:t>
-            </a:r>
-          </a:p>
-          <a:p>
-            <a:pPr/>
-            <a:r>
-              <a:t>Elite: Candidates with exceptional interface confidence (iPTM &gt; 0.86)</a:t>
-            </a:r>
-          </a:p>
-          <a:p>
-            <a:pPr/>
-            <a:r>
-              <a:t>Design: Robust winners passing multi-metric consensus thresholds</a:t>
-            </a:r>
-          </a:p>
-          <a:p>
-            <a:pPr/>
-            <a:r>
-              <a:t>Z-Score Calibration</a:t>
-            </a:r>
-          </a:p>
-          <a:p>
-            <a:pPr/>
-            <a:r>
-              <a:t>Raw structural scores were transformed into Z-scores relative to an ensemble of 500 "decoy" de novo designs. This identifies variants that reside in the tail of the distribution, ensuring that the selected binders represent significant structural outliers compared to stochastic loop folding.</a:t>
+              <a:t>Computational filtering (stages ①–④) vs experimental validation (stages ⑤–⑥).</a:t>
+            </a:r>
+          </a:p>
+          <a:p>
+            <a:pPr/>
+            <a:r>
+              <a:t>Computational Phase</a:t>
+            </a:r>
+          </a:p>
+          <a:p>
+            <a:pPr/>
+            <a:r>
+              <a:t>HADDOCK templates: Each target provides a docked starting structure. Scaffold residues are frozen in all subsequent stages — only loop backbone (①) and sequence (②) vary.</a:t>
+            </a:r>
+          </a:p>
+          <a:p>
+            <a:pPr/>
+            <a:r>
+              <a:t>T-score normalization: Each variant is scored relative to its own mean across all targets — not the population. A mediocre global binder with one uniquely-high target score earns a high T. This explicitly selects preferential binders, not globally strong ones.</a:t>
+            </a:r>
+          </a:p>
+          <a:p>
+            <a:pPr/>
+            <a:r>
+              <a:t>Multi-metric consensus: T &gt; 2.0 required on ≥2 independent AF3 metrics (ipTM, loop pLDDT, interface PAE). Prevents noise-driven false positives from a single metric.</a:t>
+            </a:r>
+          </a:p>
+          <a:p>
+            <a:pPr/>
+            <a:r>
+              <a:t>Reduction: &gt;1,000 designed sequences → 13 synthesis candidates (&gt;98% reduction).</a:t>
+            </a:r>
+          </a:p>
+          <a:p>
+            <a:pPr/>
+            <a:r>
+              <a:t>Experimental Phase</a:t>
+            </a:r>
+          </a:p>
+          <a:p>
+            <a:pPr/>
+            <a:r>
+              <a:t>Yeast surface display: Golden Gate cloning into pCT302; EBY100 yeast transformation. Surface expression detected by FITC-conjugated anti-Myc antibody. His-tagged target detected by APC-conjugated anti-His.</a:t>
+            </a:r>
+          </a:p>
+          <a:p>
+            <a:pPr/>
+            <a:r>
+              <a:t>Gating: Pentagon FSC/SSC singlet gate learned from NC via KDE. Quadrant thresholds at 99.5th percentile NC per channel — &amp;lt;0.5% NC events above threshold in either channel.</a:t>
+            </a:r>
+          </a:p>
+          <a:p>
+            <a:pPr/>
+            <a:r>
+              <a:t>Primary metric: Bind Med (Expr+) — raw APC-A median for FITC+ cells. Cross-target comparable because MMP9 and MMP2 values share the same fluorescence scale.</a:t>
+            </a:r>
+          </a:p>
+          <a:p>
+            <a:pPr/>
+            <a:r>
+              <a:t>Statistics: One-way ANOVA per construct across targets; Tukey-HSD post-hoc for pairwise target comparisons.</a:t>
             </a:r>
           </a:p>
         </p:txBody>
@@ -3320,13 +3431,13 @@
           <a:p>
             <a:pPr/>
             <a:r>
-              <a:t>layout: default</a:t>
-            </a:r>
-          </a:p>
-          <a:p>
-            <a:pPr/>
-            <a:r>
-              <a:t>transition: fade-out</a:t>
+              <a:t>layout: section</a:t>
+            </a:r>
+          </a:p>
+          <a:p>
+            <a:pPr/>
+            <a:r>
+              <a:t>transition: slide-up</a:t>
             </a:r>
           </a:p>
         </p:txBody>
@@ -3365,7 +3476,7 @@
           <a:lstStyle/>
           <a:p>
             <a:r>
-              <a:t>AlphaFold Confidence Matrix</a:t>
+              <a:t>Phase 1</a:t>
             </a:r>
           </a:p>
         </p:txBody>
@@ -3386,9 +3497,11 @@
           <a:lstStyle/>
           <a:p/>
           <a:p>
-            <a:pPr/>
-            <a:r>
-              <a:t>Standardized Z-Score analysis across target pairs.</a:t>
+            <a:pPr>
+              <a:defRPr b="1" sz="2400"/>
+            </a:pPr>
+            <a:r>
+              <a:t>Computational Candidate Generation and Selection</a:t>
             </a:r>
           </a:p>
         </p:txBody>
@@ -3446,13 +3559,13 @@
           <a:p>
             <a:pPr/>
             <a:r>
-              <a:t>layout: section</a:t>
-            </a:r>
-          </a:p>
-          <a:p>
-            <a:pPr/>
-            <a:r>
-              <a:t>transition: slide-up</a:t>
+              <a:t>layout: default</a:t>
+            </a:r>
+          </a:p>
+          <a:p>
+            <a:pPr/>
+            <a:r>
+              <a:t>transition: fade-out</a:t>
             </a:r>
           </a:p>
         </p:txBody>
@@ -3491,7 +3604,7 @@
           <a:lstStyle/>
           <a:p>
             <a:r>
-              <a:t>Phase 2</a:t>
+              <a:t>AlphaFold Confidence Metrics — What We Extract</a:t>
             </a:r>
           </a:p>
         </p:txBody>
@@ -3512,11 +3625,81 @@
           <a:lstStyle/>
           <a:p/>
           <a:p>
-            <a:pPr>
-              <a:defRPr b="1" sz="2400"/>
-            </a:pPr>
-            <a:r>
-              <a:t>Experimental Validation and Selectivity</a:t>
+            <a:pPr/>
+            <a:r>
+              <a:t>Five independent structural confidence signals per co-folded complex.</a:t>
+            </a:r>
+          </a:p>
+          <a:p>
+            <a:pPr/>
+            <a:r>
+              <a:t>pTM</a:t>
+            </a:r>
+          </a:p>
+          <a:p>
+            <a:pPr/>
+            <a:r>
+              <a:t>Global complex TM-score. Hard threshold ≥ 0.80. Confirms overall fold integrity of the TIMP3–target complex.</a:t>
+            </a:r>
+          </a:p>
+          <a:p>
+            <a:pPr/>
+            <a:r>
+              <a:t>ipTM</a:t>
+            </a:r>
+          </a:p>
+          <a:p>
+            <a:pPr/>
+            <a:r>
+              <a:t>Interface TM-score. Hard threshold ≥ 0.82. Most sensitive to loop-mediated binding geometry. Primary selection gatekeeper.</a:t>
+            </a:r>
+          </a:p>
+          <a:p>
+            <a:pPr/>
+            <a:r>
+              <a:t>Mean pLDDT</a:t>
+            </a:r>
+          </a:p>
+          <a:p>
+            <a:pPr/>
+            <a:r>
+              <a:t>Per-residue confidence, all residues. ≥70 = confident global fold. Dominated by scaffold; less discriminating for loop design.</a:t>
+            </a:r>
+          </a:p>
+          <a:p>
+            <a:pPr/>
+            <a:r>
+              <a:t>Loop pLDDT</a:t>
+            </a:r>
+          </a:p>
+          <a:p>
+            <a:pPr/>
+            <a:r>
+              <a:t>pLDDT restricted to engineered loop residues only. More discriminating than mean pLDDT — directly reflects predicted loop structure confidence.</a:t>
+            </a:r>
+          </a:p>
+          <a:p>
+            <a:pPr/>
+            <a:r>
+              <a:t>PAE (iface)</a:t>
+            </a:r>
+          </a:p>
+          <a:p>
+            <a:pPr/>
+            <a:r>
+              <a:t>Expected position error of loop residues relative to the target. Lower = more precise predicted binding geometry. Units: Å.</a:t>
+            </a:r>
+          </a:p>
+          <a:p>
+            <a:pPr/>
+            <a:r>
+              <a:t>Why five metrics? Each captures a different aspect of the predicted interface: global fold (pTM), interface quality (ipTM), whole-structure confidence (mean pLDDT), loop-specific confidence (loop pLDDT), geometric precision (PAE). A binder that scores high on all five is more likely to be a true positive than one that excels on only one.</a:t>
+            </a:r>
+          </a:p>
+          <a:p>
+            <a:pPr/>
+            <a:r>
+              <a:t>Selection logic: Hard thresholds (ipTM ≥ 0.82, pTM ≥ 0.80) are applied first as gates. Remaining candidates are ranked by T-score — a self-normalized metric that compares each variant against its own cross-target distribution, not the population. See next slide for T-score details.</a:t>
             </a:r>
           </a:p>
         </p:txBody>
@@ -3619,7 +3802,7 @@
           <a:lstStyle/>
           <a:p>
             <a:r>
-              <a:t>Interactive FCS Analysis</a:t>
+              <a:t>T-Score: Selecting for Preference, Not Just Strength</a:t>
             </a:r>
           </a:p>
         </p:txBody>
@@ -3642,7 +3825,85 @@
           <a:p>
             <a:pPr/>
             <a:r>
-              <a:t>Detailed exploration of raw population distributions and gating metrics.</a:t>
+              <a:t>Self-normalized — each variant is its own control across all targets.</a:t>
+            </a:r>
+          </a:p>
+          <a:p>
+            <a:pPr/>
+            <a:r>
+              <a:t>T &gt; 2.0</a:t>
+            </a:r>
+          </a:p>
+          <a:p>
+            <a:pPr/>
+            <a:r>
+              <a:t>97.5th %ile</a:t>
+            </a:r>
+          </a:p>
+          <a:p>
+            <a:pPr/>
+            <a:r>
+              <a:t>Required on ≥2 metrics</a:t>
+            </a:r>
+          </a:p>
+          <a:p>
+            <a:pPr/>
+            <a:r>
+              <a:t>ipTM ≥ 0.82</a:t>
+            </a:r>
+          </a:p>
+          <a:p>
+            <a:pPr/>
+            <a:r>
+              <a:t>Interface floor</a:t>
+            </a:r>
+          </a:p>
+          <a:p>
+            <a:pPr/>
+            <a:r>
+              <a:t>Hard gate applied first</a:t>
+            </a:r>
+          </a:p>
+          <a:p>
+            <a:pPr/>
+            <a:r>
+              <a:t>13 / &gt;1000</a:t>
+            </a:r>
+          </a:p>
+          <a:p>
+            <a:pPr/>
+            <a:r>
+              <a:t>Pass filter</a:t>
+            </a:r>
+          </a:p>
+          <a:p>
+            <a:pPr/>
+            <a:r>
+              <a:t>&gt;98% candidate reduction</a:t>
+            </a:r>
+          </a:p>
+          <a:p>
+            <a:pPr/>
+            <a:r>
+              <a:t>T-score vs Z-score: Z-score identifies variants that bind better than the population — a globally excellent binder earns a high Z regardless of selectivity.</a:t>
+            </a:r>
+          </a:p>
+          <a:p>
+            <a:pPr/>
+            <a:r>
+              <a:t>T-score identifies variants that bind this target better than their own cross-target average.</a:t>
+            </a:r>
+          </a:p>
+          <a:p>
+            <a:pPr/>
+            <a:r>
+              <a:t>A mediocre global binder with one uniquely high score earns a high T — exactly the selectivity-optimizing behavior we want.</a:t>
+            </a:r>
+          </a:p>
+          <a:p>
+            <a:pPr/>
+            <a:r>
+              <a:t>Multi-metric consensus: T &gt; 2.0 required on ≥2 independent metrics (ipTM, loop pLDDT, interface PAE). Agreement across orthogonal signals prevents noise-driven false positives from any single metric.</a:t>
             </a:r>
           </a:p>
         </p:txBody>
@@ -3745,7 +4006,7 @@
           <a:lstStyle/>
           <a:p>
             <a:r>
-              <a:t>Binding Efficiency and Specificity</a:t>
+              <a:t>T-Score Results — Statistical Significance Matrix</a:t>
             </a:r>
           </a:p>
         </p:txBody>
@@ -3768,67 +4029,7 @@
           <a:p>
             <a:pPr/>
             <a:r>
-              <a:t>Normalizing experimental results against TIMP3-WT baseline.</a:t>
-            </a:r>
-          </a:p>
-          <a:p>
-            <a:pPr/>
-            <a:r>
-              <a:t>Analysis Methodology</a:t>
-            </a:r>
-          </a:p>
-          <a:p>
-            <a:pPr/>
-            <a:r>
-              <a:t>Binders were evaluated for normalization against TIMP3-WT across multi-target trials.</a:t>
-            </a:r>
-          </a:p>
-          <a:p>
-            <a:pPr/>
-            <a:r>
-              <a:t>The AB loops showed a significant enrichment in binding efficiency (DP/FITC+) for the MMP3 and MMP9 families, while ADAM10 served as a negative control due to batch-specific target degradation.</a:t>
-            </a:r>
-          </a:p>
-          <a:p>
-            <a:pPr/>
-            <a:r>
-              <a:t>Target specificity switch: Successful discrimination between MMP and ADAM families</a:t>
-            </a:r>
-          </a:p>
-          <a:p>
-            <a:pPr/>
-            <a:r>
-              <a:t>Correlation: AlphaFold ipTM Z-scores vs Experimental affinity</a:t>
-            </a:r>
-          </a:p>
-          <a:p>
-            <a:pPr/>
-            <a:r>
-              <a:t>Experimental Results</a:t>
-            </a:r>
-          </a:p>
-          <a:p>
-            <a:pPr/>
-            <a:r>
-              <a:t>~1.7x</a:t>
-            </a:r>
-          </a:p>
-          <a:p>
-            <a:pPr/>
-            <a:r>
-              <a:t>MMP3 Enrichment</a:t>
-            </a:r>
-          </a:p>
-          <a:p>
-            <a:pPr/>
-            <a:r>
-              <a:t>93%</a:t>
-            </a:r>
-          </a:p>
-          <a:p>
-            <a:pPr/>
-            <a:r>
-              <a:t>Binding Efficiency</a:t>
+              <a:t>Filter by loop type; scroll for all variants. Green = T &gt; 2.0 (significant win on that target).</a:t>
             </a:r>
           </a:p>
         </p:txBody>
@@ -3956,13 +4157,7 @@
               <a:defRPr b="1" sz="2400"/>
             </a:pPr>
             <a:r>
-              <a:t>RFdiffusion to Experimental Validation Pipeline</a:t>
-            </a:r>
-          </a:p>
-          <a:p>
-            <a:pPr/>
-            <a:r>
-              <a:t>Thread Status</a:t>
+              <a:t>RFdiffusion → ProteinMPNN → AlphaFold3 → Yeast Display</a:t>
             </a:r>
           </a:p>
           <a:p>
@@ -3974,13 +4169,31 @@
           <a:p>
             <a:pPr/>
             <a:r>
+              <a:t>3/4 Predicted Selective Confirmed</a:t>
+            </a:r>
+          </a:p>
+          <a:p>
+            <a:pPr/>
+            <a:r>
               <a:t>Primary Targets</a:t>
             </a:r>
           </a:p>
           <a:p>
             <a:pPr/>
             <a:r>
-              <a:t>ADAM10/17 | MMP2/9</a:t>
+              <a:t>MMP9 vs MMP2</a:t>
+            </a:r>
+          </a:p>
+          <a:p>
+            <a:pPr/>
+            <a:r>
+              <a:t>PPV</a:t>
+            </a:r>
+          </a:p>
+          <a:p>
+            <a:pPr/>
+            <a:r>
+              <a:t>75%</a:t>
             </a:r>
           </a:p>
           <a:p>
@@ -4061,7 +4274,7 @@
           <a:lstStyle/>
           <a:p>
             <a:r>
-              <a:t>Cross-Target Binding Analysis</a:t>
+              <a:t>Final Ordered Library — 13 Constructs</a:t>
             </a:r>
           </a:p>
         </p:txBody>
@@ -4084,7 +4297,7 @@
           <a:p>
             <a:pPr/>
             <a:r>
-              <a:t>Statistical summary of normalized median intensity across replicates.</a:t>
+              <a:t>All constructs passed RE site screening (BsrGI, BamHI, BsaI).</a:t>
             </a:r>
           </a:p>
         </p:txBody>
@@ -4187,7 +4400,7 @@
           <a:lstStyle/>
           <a:p>
             <a:r>
-              <a:t>Conclusion and Strategic Roadmap</a:t>
+              <a:t>Final Library — Loop Group Breakdown</a:t>
             </a:r>
           </a:p>
         </p:txBody>
@@ -4210,97 +4423,79 @@
           <a:p>
             <a:pPr/>
             <a:r>
-              <a:t>Summary of current progress and future research directions.</a:t>
-            </a:r>
-          </a:p>
-          <a:p>
-            <a:pPr/>
-            <a:r>
-              <a:t>Key Findings</a:t>
-            </a:r>
-          </a:p>
-          <a:p>
-            <a:pPr/>
-            <a:r>
-              <a:t>01</a:t>
-            </a:r>
-          </a:p>
-          <a:p>
-            <a:pPr/>
-            <a:r>
-              <a:t>Successful de novo generation of high-affinity binders for ADAM10.</a:t>
-            </a:r>
-          </a:p>
-          <a:p>
-            <a:pPr/>
-            <a:r>
-              <a:t>02</a:t>
-            </a:r>
-          </a:p>
-          <a:p>
-            <a:pPr/>
-            <a:r>
-              <a:t>Validated selectivity switch between ADAM10/17 and MMP2/9 families.</a:t>
-            </a:r>
-          </a:p>
-          <a:p>
-            <a:pPr/>
-            <a:r>
-              <a:t>03</a:t>
-            </a:r>
-          </a:p>
-          <a:p>
-            <a:pPr/>
-            <a:r>
-              <a:t>Correlation established between AlphaFold Z-scores and binding efficiency.</a:t>
-            </a:r>
-          </a:p>
-          <a:p>
-            <a:pPr/>
-            <a:r>
-              <a:t>In Vitro</a:t>
-            </a:r>
-          </a:p>
-          <a:p>
-            <a:pPr/>
-            <a:r>
-              <a:t>FRET Kinetics</a:t>
-            </a:r>
-          </a:p>
-          <a:p>
-            <a:pPr/>
-            <a:r>
-              <a:t>Structural</a:t>
-            </a:r>
-          </a:p>
-          <a:p>
-            <a:pPr/>
-            <a:r>
-              <a:t>X-Ray Resolution</a:t>
-            </a:r>
-          </a:p>
-          <a:p>
-            <a:pPr/>
-            <a:r>
-              <a:t>Optimization</a:t>
-            </a:r>
-          </a:p>
-          <a:p>
-            <a:pPr/>
-            <a:r>
-              <a:t>ESM-2 Refinement</a:t>
-            </a:r>
-          </a:p>
-          <a:p>
-            <a:pPr/>
-            <a:r>
-              <a:t>Expansion</a:t>
-            </a:r>
-          </a:p>
-          <a:p>
-            <a:pPr/>
-            <a:r>
-              <a:t>Custom Markers</a:t>
+              <a:t>AB-Loop Variants (7)</a:t>
+            </a:r>
+          </a:p>
+          <a:p>
+            <a:pPr/>
+            <a:r>
+              <a:t>Native residues 31–36; extensions 6–15 aa. Targeted at MMP9 active site</a:t>
+            </a:r>
+          </a:p>
+          <a:p>
+            <a:pPr/>
+            <a:r>
+              <a:t>via HADDOCK geometry. AB 6 showed the strongest statistical signal (p = 0.0002).</a:t>
+            </a:r>
+          </a:p>
+          <a:p>
+            <a:pPr/>
+            <a:r>
+              <a:t>AB 1 was predicted selective — directionally correct but ANOVA non-significant due to high trial-to-trial variance.</a:t>
+            </a:r>
+          </a:p>
+          <a:p>
+            <a:pPr/>
+            <a:r>
+              <a:t>C-Loop Variants (5)</a:t>
+            </a:r>
+          </a:p>
+          <a:p>
+            <a:pPr/>
+            <a:r>
+              <a:t>Native residues 63–68. C 12 (loop: ASGPITVNGETIW) and C 15 both confirmed</a:t>
+            </a:r>
+          </a:p>
+          <a:p>
+            <a:pPr/>
+            <a:r>
+              <a:t>MMP9-selective at p &amp;lt; 0.02. Up to 13 aa insertions tolerated without</a:t>
+            </a:r>
+          </a:p>
+          <a:p>
+            <a:pPr/>
+            <a:r>
+              <a:t>loss of yeast surface display function.</a:t>
+            </a:r>
+          </a:p>
+          <a:p>
+            <a:pPr/>
+            <a:r>
+              <a:t>ADAM17-Targeted (4)</a:t>
+            </a:r>
+          </a:p>
+          <a:p>
+            <a:pPr/>
+            <a:r>
+              <a:t>AB 4, AB 7, C 11, C 14 designed for ADAM17. ADAM10 comparison pending</a:t>
+            </a:r>
+          </a:p>
+          <a:p>
+            <a:pPr/>
+            <a:r>
+              <a:t>positive control optimization. Included in within-target analysis only.</a:t>
+            </a:r>
+          </a:p>
+          <a:p>
+            <a:pPr/>
+            <a:r>
+              <a:t>Extend the pipeline to inflammatory signaling vs Alzheimer's disease target pair.</a:t>
+            </a:r>
+          </a:p>
+          <a:p>
+            <a:pPr/>
+            <a:r>
+              <a:t>Library design rationale: MMP9-targeted constructs span both primary contact loops (AB and C) to probe whether selectivity is loop-position–specific or generalizable across the TIMP3 interface. The ADAM17 group tests pipeline generalizability beyond the MMP scaffold in the same experimental cycle.</a:t>
             </a:r>
           </a:p>
         </p:txBody>
@@ -4358,13 +4553,13 @@
           <a:p>
             <a:pPr/>
             <a:r>
-              <a:t>layout: center</a:t>
-            </a:r>
-          </a:p>
-          <a:p>
-            <a:pPr/>
-            <a:r>
-              <a:t>class: text-center</a:t>
+              <a:t>layout: section</a:t>
+            </a:r>
+          </a:p>
+          <a:p>
+            <a:pPr/>
+            <a:r>
+              <a:t>transition: slide-up</a:t>
             </a:r>
           </a:p>
         </p:txBody>
@@ -4403,7 +4598,7 @@
           <a:lstStyle/>
           <a:p>
             <a:r>
-              <a:t>Questions</a:t>
+              <a:t>Phase 2</a:t>
             </a:r>
           </a:p>
         </p:txBody>
@@ -4428,13 +4623,389 @@
               <a:defRPr b="1" sz="2400"/>
             </a:pPr>
             <a:r>
-              <a:t>De Novo Binder Generation Research Thread</a:t>
-            </a:r>
-          </a:p>
-          <a:p>
-            <a:pPr/>
-            <a:r>
-              <a:t>Repository: PhD-Research / Demonstrations / De_Novo_Binder_Generation</a:t>
+              <a:t>Experimental Validation — Flow Cytometry Metrics</a:t>
+            </a:r>
+          </a:p>
+        </p:txBody>
+      </p:sp>
+    </p:spTree>
+  </p:cSld>
+  <p:clrMapOvr>
+    <a:masterClrMapping/>
+  </p:clrMapOvr>
+</p:sld>
+</file>
+
+<file path=ppt/slides/slide25.xml><?xml version="1.0" encoding="utf-8"?>
+<p:sld xmlns:a="http://schemas.openxmlformats.org/drawingml/2006/main" xmlns:p="http://schemas.openxmlformats.org/presentationml/2006/main" xmlns:r="http://schemas.openxmlformats.org/officeDocument/2006/relationships">
+  <p:cSld>
+    <p:spTree>
+      <p:nvGrpSpPr>
+        <p:cNvPr id="1" name=""/>
+        <p:cNvGrpSpPr/>
+        <p:nvPr/>
+      </p:nvGrpSpPr>
+      <p:grpSpPr/>
+      <p:sp>
+        <p:nvSpPr>
+          <p:cNvPr id="2" name="Title 1"/>
+          <p:cNvSpPr>
+            <a:spLocks noGrp="1"/>
+          </p:cNvSpPr>
+          <p:nvPr>
+            <p:ph type="title"/>
+          </p:nvPr>
+        </p:nvSpPr>
+        <p:spPr/>
+        <p:txBody>
+          <a:bodyPr/>
+          <a:lstStyle/>
+          <a:p/>
+        </p:txBody>
+      </p:sp>
+      <p:sp>
+        <p:nvSpPr>
+          <p:cNvPr id="3" name="Content Placeholder 2"/>
+          <p:cNvSpPr>
+            <a:spLocks noGrp="1"/>
+          </p:cNvSpPr>
+          <p:nvPr>
+            <p:ph idx="1"/>
+          </p:nvPr>
+        </p:nvSpPr>
+        <p:spPr/>
+        <p:txBody>
+          <a:bodyPr wrap="square"/>
+          <a:lstStyle/>
+          <a:p/>
+          <a:p>
+            <a:pPr/>
+            <a:r>
+              <a:t>layout: default</a:t>
+            </a:r>
+          </a:p>
+          <a:p>
+            <a:pPr/>
+            <a:r>
+              <a:t>transition: fade-out</a:t>
+            </a:r>
+          </a:p>
+        </p:txBody>
+      </p:sp>
+    </p:spTree>
+  </p:cSld>
+  <p:clrMapOvr>
+    <a:masterClrMapping/>
+  </p:clrMapOvr>
+</p:sld>
+</file>
+
+<file path=ppt/slides/slide26.xml><?xml version="1.0" encoding="utf-8"?>
+<p:sld xmlns:a="http://schemas.openxmlformats.org/drawingml/2006/main" xmlns:p="http://schemas.openxmlformats.org/presentationml/2006/main" xmlns:r="http://schemas.openxmlformats.org/officeDocument/2006/relationships">
+  <p:cSld>
+    <p:spTree>
+      <p:nvGrpSpPr>
+        <p:cNvPr id="1" name=""/>
+        <p:cNvGrpSpPr/>
+        <p:nvPr/>
+      </p:nvGrpSpPr>
+      <p:grpSpPr/>
+      <p:sp>
+        <p:nvSpPr>
+          <p:cNvPr id="2" name="Title 1"/>
+          <p:cNvSpPr>
+            <a:spLocks noGrp="1"/>
+          </p:cNvSpPr>
+          <p:nvPr>
+            <p:ph type="title"/>
+          </p:nvPr>
+        </p:nvSpPr>
+        <p:spPr/>
+        <p:txBody>
+          <a:bodyPr/>
+          <a:lstStyle/>
+          <a:p>
+            <a:r>
+              <a:t>Gating Strategy</a:t>
+            </a:r>
+          </a:p>
+        </p:txBody>
+      </p:sp>
+      <p:sp>
+        <p:nvSpPr>
+          <p:cNvPr id="3" name="Content Placeholder 2"/>
+          <p:cNvSpPr>
+            <a:spLocks noGrp="1"/>
+          </p:cNvSpPr>
+          <p:nvPr>
+            <p:ph idx="1"/>
+          </p:nvPr>
+        </p:nvSpPr>
+        <p:spPr/>
+        <p:txBody>
+          <a:bodyPr wrap="square"/>
+          <a:lstStyle/>
+          <a:p/>
+          <a:p>
+            <a:pPr/>
+            <a:r>
+              <a:t>Pentagon scatter gate + 99.5th percentile NC quadrant thresholds.</a:t>
+            </a:r>
+          </a:p>
+          <a:p>
+            <a:pPr/>
+            <a:r>
+              <a:t>Step 1 — Pentagon Scatter Gate</a:t>
+            </a:r>
+          </a:p>
+          <a:p>
+            <a:pPr/>
+            <a:r>
+              <a:t>KDE on FSC-A vs SSC-A from negative control. Binary search for 90% core-event inclusion.</a:t>
+            </a:r>
+          </a:p>
+          <a:p>
+            <a:pPr/>
+            <a:r>
+              <a:t>Convex hull simplified to 5 vertices (Visvalingam-Whyatt). Applied identically to all</a:t>
+            </a:r>
+          </a:p>
+          <a:p>
+            <a:pPr/>
+            <a:r>
+              <a:t>samples in the trial — ensures no sample-specific selection bias.</a:t>
+            </a:r>
+          </a:p>
+          <a:p>
+            <a:pPr/>
+            <a:r>
+              <a:t>Step 2 — Dynamic Quadrant Gate</a:t>
+            </a:r>
+          </a:p>
+          <a:p>
+            <a:pPr/>
+            <a:r>
+              <a:t>Expression threshold (θexpr): 99.5th percentile of FITC-A in NC.</a:t>
+            </a:r>
+          </a:p>
+          <a:p>
+            <a:pPr/>
+            <a:r>
+              <a:t>Binding threshold (θbind): 99.5th percentile of APC-A in NC.</a:t>
+            </a:r>
+          </a:p>
+          <a:p>
+            <a:pPr/>
+            <a:r>
+              <a:t>&amp;lt;0.5% NC events above threshold per channel. Q2 (upper-right) = double positive (DP) — expressing and binding.</a:t>
+            </a:r>
+          </a:p>
+        </p:txBody>
+      </p:sp>
+    </p:spTree>
+  </p:cSld>
+  <p:clrMapOvr>
+    <a:masterClrMapping/>
+  </p:clrMapOvr>
+</p:sld>
+</file>
+
+<file path=ppt/slides/slide27.xml><?xml version="1.0" encoding="utf-8"?>
+<p:sld xmlns:a="http://schemas.openxmlformats.org/drawingml/2006/main" xmlns:p="http://schemas.openxmlformats.org/presentationml/2006/main" xmlns:r="http://schemas.openxmlformats.org/officeDocument/2006/relationships">
+  <p:cSld>
+    <p:spTree>
+      <p:nvGrpSpPr>
+        <p:cNvPr id="1" name=""/>
+        <p:cNvGrpSpPr/>
+        <p:nvPr/>
+      </p:nvGrpSpPr>
+      <p:grpSpPr/>
+      <p:sp>
+        <p:nvSpPr>
+          <p:cNvPr id="2" name="Title 1"/>
+          <p:cNvSpPr>
+            <a:spLocks noGrp="1"/>
+          </p:cNvSpPr>
+          <p:nvPr>
+            <p:ph type="title"/>
+          </p:nvPr>
+        </p:nvSpPr>
+        <p:spPr/>
+        <p:txBody>
+          <a:bodyPr/>
+          <a:lstStyle/>
+          <a:p/>
+        </p:txBody>
+      </p:sp>
+      <p:sp>
+        <p:nvSpPr>
+          <p:cNvPr id="3" name="Content Placeholder 2"/>
+          <p:cNvSpPr>
+            <a:spLocks noGrp="1"/>
+          </p:cNvSpPr>
+          <p:nvPr>
+            <p:ph idx="1"/>
+          </p:nvPr>
+        </p:nvSpPr>
+        <p:spPr/>
+        <p:txBody>
+          <a:bodyPr wrap="square"/>
+          <a:lstStyle/>
+          <a:p/>
+          <a:p>
+            <a:pPr/>
+            <a:r>
+              <a:t>layout: default</a:t>
+            </a:r>
+          </a:p>
+          <a:p>
+            <a:pPr/>
+            <a:r>
+              <a:t>transition: fade-out</a:t>
+            </a:r>
+          </a:p>
+        </p:txBody>
+      </p:sp>
+    </p:spTree>
+  </p:cSld>
+  <p:clrMapOvr>
+    <a:masterClrMapping/>
+  </p:clrMapOvr>
+</p:sld>
+</file>
+
+<file path=ppt/slides/slide28.xml><?xml version="1.0" encoding="utf-8"?>
+<p:sld xmlns:a="http://schemas.openxmlformats.org/drawingml/2006/main" xmlns:p="http://schemas.openxmlformats.org/presentationml/2006/main" xmlns:r="http://schemas.openxmlformats.org/officeDocument/2006/relationships">
+  <p:cSld>
+    <p:spTree>
+      <p:nvGrpSpPr>
+        <p:cNvPr id="1" name=""/>
+        <p:cNvGrpSpPr/>
+        <p:nvPr/>
+      </p:nvGrpSpPr>
+      <p:grpSpPr/>
+      <p:sp>
+        <p:nvSpPr>
+          <p:cNvPr id="2" name="Title 1"/>
+          <p:cNvSpPr>
+            <a:spLocks noGrp="1"/>
+          </p:cNvSpPr>
+          <p:nvPr>
+            <p:ph type="title"/>
+          </p:nvPr>
+        </p:nvSpPr>
+        <p:spPr/>
+        <p:txBody>
+          <a:bodyPr/>
+          <a:lstStyle/>
+          <a:p>
+            <a:r>
+              <a:t>Flow Cytometry Metrics — Hover for Detail</a:t>
+            </a:r>
+          </a:p>
+        </p:txBody>
+      </p:sp>
+      <p:sp>
+        <p:nvSpPr>
+          <p:cNvPr id="3" name="Content Placeholder 2"/>
+          <p:cNvSpPr>
+            <a:spLocks noGrp="1"/>
+          </p:cNvSpPr>
+          <p:nvPr>
+            <p:ph idx="1"/>
+          </p:nvPr>
+        </p:nvSpPr>
+        <p:spPr/>
+        <p:txBody>
+          <a:bodyPr wrap="square"/>
+          <a:lstStyle/>
+          <a:p/>
+          <a:p>
+            <a:pPr/>
+            <a:r>
+              <a:t>Six quantitative metrics extracted per sample. Hover any card for full definition, scope, and use.</a:t>
+            </a:r>
+          </a:p>
+          <a:p>
+            <a:pPr/>
+            <a:r>
+              <a:t>Cross-target: Bind Med (Expr+), Binding Efficiency</a:t>
+            </a:r>
+          </a:p>
+          <a:p>
+            <a:pPr/>
+            <a:r>
+              <a:t>Within-target: Norm Bind Med, Norm Median Ratio, Norm IWB</a:t>
+            </a:r>
+          </a:p>
+          <a:p>
+            <a:pPr/>
+            <a:r>
+              <a:t>QC only: Stain Index</a:t>
+            </a:r>
+          </a:p>
+        </p:txBody>
+      </p:sp>
+    </p:spTree>
+  </p:cSld>
+  <p:clrMapOvr>
+    <a:masterClrMapping/>
+  </p:clrMapOvr>
+</p:sld>
+</file>
+
+<file path=ppt/slides/slide29.xml><?xml version="1.0" encoding="utf-8"?>
+<p:sld xmlns:a="http://schemas.openxmlformats.org/drawingml/2006/main" xmlns:p="http://schemas.openxmlformats.org/presentationml/2006/main" xmlns:r="http://schemas.openxmlformats.org/officeDocument/2006/relationships">
+  <p:cSld>
+    <p:spTree>
+      <p:nvGrpSpPr>
+        <p:cNvPr id="1" name=""/>
+        <p:cNvGrpSpPr/>
+        <p:nvPr/>
+      </p:nvGrpSpPr>
+      <p:grpSpPr/>
+      <p:sp>
+        <p:nvSpPr>
+          <p:cNvPr id="2" name="Title 1"/>
+          <p:cNvSpPr>
+            <a:spLocks noGrp="1"/>
+          </p:cNvSpPr>
+          <p:nvPr>
+            <p:ph type="title"/>
+          </p:nvPr>
+        </p:nvSpPr>
+        <p:spPr/>
+        <p:txBody>
+          <a:bodyPr/>
+          <a:lstStyle/>
+          <a:p/>
+        </p:txBody>
+      </p:sp>
+      <p:sp>
+        <p:nvSpPr>
+          <p:cNvPr id="3" name="Content Placeholder 2"/>
+          <p:cNvSpPr>
+            <a:spLocks noGrp="1"/>
+          </p:cNvSpPr>
+          <p:nvPr>
+            <p:ph idx="1"/>
+          </p:nvPr>
+        </p:nvSpPr>
+        <p:spPr/>
+        <p:txBody>
+          <a:bodyPr wrap="square"/>
+          <a:lstStyle/>
+          <a:p/>
+          <a:p>
+            <a:pPr/>
+            <a:r>
+              <a:t>layout: default</a:t>
+            </a:r>
+          </a:p>
+          <a:p>
+            <a:pPr/>
+            <a:r>
+              <a:t>transition: fade-out</a:t>
             </a:r>
           </a:p>
         </p:txBody>
@@ -4511,6 +5082,1200 @@
 </p:sld>
 </file>
 
+<file path=ppt/slides/slide30.xml><?xml version="1.0" encoding="utf-8"?>
+<p:sld xmlns:a="http://schemas.openxmlformats.org/drawingml/2006/main" xmlns:p="http://schemas.openxmlformats.org/presentationml/2006/main" xmlns:r="http://schemas.openxmlformats.org/officeDocument/2006/relationships">
+  <p:cSld>
+    <p:spTree>
+      <p:nvGrpSpPr>
+        <p:cNvPr id="1" name=""/>
+        <p:cNvGrpSpPr/>
+        <p:nvPr/>
+      </p:nvGrpSpPr>
+      <p:grpSpPr/>
+      <p:sp>
+        <p:nvSpPr>
+          <p:cNvPr id="2" name="Title 1"/>
+          <p:cNvSpPr>
+            <a:spLocks noGrp="1"/>
+          </p:cNvSpPr>
+          <p:nvPr>
+            <p:ph type="title"/>
+          </p:nvPr>
+        </p:nvSpPr>
+        <p:spPr/>
+        <p:txBody>
+          <a:bodyPr/>
+          <a:lstStyle/>
+          <a:p>
+            <a:r>
+              <a:t>Primary Metric: Positive Median Ratio (APC/FITC)</a:t>
+            </a:r>
+          </a:p>
+        </p:txBody>
+      </p:sp>
+      <p:sp>
+        <p:nvSpPr>
+          <p:cNvPr id="3" name="Content Placeholder 2"/>
+          <p:cNvSpPr>
+            <a:spLocks noGrp="1"/>
+          </p:cNvSpPr>
+          <p:nvPr>
+            <p:ph idx="1"/>
+          </p:nvPr>
+        </p:nvSpPr>
+        <p:spPr/>
+        <p:txBody>
+          <a:bodyPr wrap="square"/>
+          <a:lstStyle/>
+          <a:p/>
+          <a:p>
+            <a:pPr/>
+            <a:r>
+              <a:t>APC/FITC median ratio in expressing cells — cross-target comparable, expression-corrected.</a:t>
+            </a:r>
+          </a:p>
+          <a:p>
+            <a:pPr/>
+            <a:r>
+              <a:t>Definition</a:t>
+            </a:r>
+          </a:p>
+          <a:p>
+            <a:pPr/>
+            <a:r>
+              <a:t>Pos Med Ratio =</a:t>
+            </a:r>
+          </a:p>
+          <a:p>
+            <a:pPr/>
+            <a:r>
+              <a:t>&amp;nbsp;&amp;nbsp;median(APC-A) / median(FITC-A)&amp;nbsp;&amp;nbsp;[FITC+ gate]</a:t>
+            </a:r>
+          </a:p>
+          <a:p>
+            <a:pPr/>
+            <a:r>
+              <a:t>Norm Median Ratio =</a:t>
+            </a:r>
+          </a:p>
+          <a:p>
+            <a:pPr/>
+            <a:r>
+              <a:t>&amp;nbsp;&amp;nbsp;Pos Med Ratio(sample) / Pos Med Ratio(TIMP3-WT)</a:t>
+            </a:r>
+          </a:p>
+          <a:p>
+            <a:pPr/>
+            <a:r>
+              <a:t>Restricted to FITC+ cells. Dividing APC by FITC corrects for surface-display</a:t>
+            </a:r>
+          </a:p>
+          <a:p>
+            <a:pPr/>
+            <a:r>
+              <a:t>variation between individual cells. Cross-target comparable: MMP9 and MMP2 share</a:t>
+            </a:r>
+          </a:p>
+          <a:p>
+            <a:pPr/>
+            <a:r>
+              <a:t>the same FITC detection antibody so the denominator is equivalent across targets.</a:t>
+            </a:r>
+          </a:p>
+          <a:p>
+            <a:pPr/>
+            <a:r>
+              <a:t>Error bars = 95% CI (t-distribution). Failed trials excluded.</a:t>
+            </a:r>
+          </a:p>
+          <a:p>
+            <a:pPr/>
+            <a:r>
+              <a:t>vs Binding Efficiency:</a:t>
+            </a:r>
+          </a:p>
+          <a:p>
+            <a:pPr/>
+            <a:r>
+              <a:t>Efficiency = fraction of expressors that cross the APC threshold.</a:t>
+            </a:r>
+          </a:p>
+          <a:p>
+            <a:pPr/>
+            <a:r>
+              <a:t>Pos Med Ratio = continuous intensity of binding per unit expression.</a:t>
+            </a:r>
+          </a:p>
+          <a:p>
+            <a:pPr/>
+            <a:r>
+              <a:t>Pos Med Ratio uses all FITC+ cells; Efficiency uses a binary gate. Both are cross-target comparable.</a:t>
+            </a:r>
+          </a:p>
+          <a:p>
+            <a:pPr/>
+            <a:r>
+              <a:t>Pos Med Ratio per construct — MMP9 (green) vs MMP2 (red), APC/FITC.</a:t>
+            </a:r>
+          </a:p>
+          <a:p>
+            <a:pPr/>
+            <a:r>
+              <a:t>Dashed lines = TIMP3-WT ratio per target. Error bars = 95% CI. Significance by Tukey-HSD.</a:t>
+            </a:r>
+          </a:p>
+        </p:txBody>
+      </p:sp>
+    </p:spTree>
+  </p:cSld>
+  <p:clrMapOvr>
+    <a:masterClrMapping/>
+  </p:clrMapOvr>
+</p:sld>
+</file>
+
+<file path=ppt/slides/slide31.xml><?xml version="1.0" encoding="utf-8"?>
+<p:sld xmlns:a="http://schemas.openxmlformats.org/drawingml/2006/main" xmlns:p="http://schemas.openxmlformats.org/presentationml/2006/main" xmlns:r="http://schemas.openxmlformats.org/officeDocument/2006/relationships">
+  <p:cSld>
+    <p:spTree>
+      <p:nvGrpSpPr>
+        <p:cNvPr id="1" name=""/>
+        <p:cNvGrpSpPr/>
+        <p:nvPr/>
+      </p:nvGrpSpPr>
+      <p:grpSpPr/>
+      <p:sp>
+        <p:nvSpPr>
+          <p:cNvPr id="2" name="Title 1"/>
+          <p:cNvSpPr>
+            <a:spLocks noGrp="1"/>
+          </p:cNvSpPr>
+          <p:nvPr>
+            <p:ph type="title"/>
+          </p:nvPr>
+        </p:nvSpPr>
+        <p:spPr/>
+        <p:txBody>
+          <a:bodyPr/>
+          <a:lstStyle/>
+          <a:p/>
+        </p:txBody>
+      </p:sp>
+      <p:sp>
+        <p:nvSpPr>
+          <p:cNvPr id="3" name="Content Placeholder 2"/>
+          <p:cNvSpPr>
+            <a:spLocks noGrp="1"/>
+          </p:cNvSpPr>
+          <p:nvPr>
+            <p:ph idx="1"/>
+          </p:nvPr>
+        </p:nvSpPr>
+        <p:spPr/>
+        <p:txBody>
+          <a:bodyPr wrap="square"/>
+          <a:lstStyle/>
+          <a:p/>
+          <a:p>
+            <a:pPr/>
+            <a:r>
+              <a:t>layout: default</a:t>
+            </a:r>
+          </a:p>
+          <a:p>
+            <a:pPr/>
+            <a:r>
+              <a:t>transition: fade-out</a:t>
+            </a:r>
+          </a:p>
+        </p:txBody>
+      </p:sp>
+    </p:spTree>
+  </p:cSld>
+  <p:clrMapOvr>
+    <a:masterClrMapping/>
+  </p:clrMapOvr>
+</p:sld>
+</file>
+
+<file path=ppt/slides/slide32.xml><?xml version="1.0" encoding="utf-8"?>
+<p:sld xmlns:a="http://schemas.openxmlformats.org/drawingml/2006/main" xmlns:p="http://schemas.openxmlformats.org/presentationml/2006/main" xmlns:r="http://schemas.openxmlformats.org/officeDocument/2006/relationships">
+  <p:cSld>
+    <p:spTree>
+      <p:nvGrpSpPr>
+        <p:cNvPr id="1" name=""/>
+        <p:cNvGrpSpPr/>
+        <p:nvPr/>
+      </p:nvGrpSpPr>
+      <p:grpSpPr/>
+      <p:sp>
+        <p:nvSpPr>
+          <p:cNvPr id="2" name="Title 1"/>
+          <p:cNvSpPr>
+            <a:spLocks noGrp="1"/>
+          </p:cNvSpPr>
+          <p:nvPr>
+            <p:ph type="title"/>
+          </p:nvPr>
+        </p:nvSpPr>
+        <p:spPr/>
+        <p:txBody>
+          <a:bodyPr/>
+          <a:lstStyle/>
+          <a:p>
+            <a:r>
+              <a:t>Within-Target Ranking: Norm Bind Med (Expr+)</a:t>
+            </a:r>
+          </a:p>
+        </p:txBody>
+      </p:sp>
+      <p:sp>
+        <p:nvSpPr>
+          <p:cNvPr id="3" name="Content Placeholder 2"/>
+          <p:cNvSpPr>
+            <a:spLocks noGrp="1"/>
+          </p:cNvSpPr>
+          <p:nvPr>
+            <p:ph idx="1"/>
+          </p:nvPr>
+        </p:nvSpPr>
+        <p:spPr/>
+        <p:txBody>
+          <a:bodyPr wrap="square"/>
+          <a:lstStyle/>
+          <a:p/>
+          <a:p>
+            <a:pPr/>
+            <a:r>
+              <a:t>How do variants compare to TIMP3-WT on the same target?</a:t>
+            </a:r>
+          </a:p>
+          <a:p>
+            <a:pPr/>
+            <a:r>
+              <a:t>Each target normalized independently to TIMP3-WT (= 1.0).</a:t>
+            </a:r>
+          </a:p>
+          <a:p>
+            <a:pPr/>
+            <a:r>
+              <a:t>Do not compare MMP9 values to MMP2 values across rows.</a:t>
+            </a:r>
+          </a:p>
+          <a:p>
+            <a:pPr/>
+            <a:r>
+              <a:t>Why normalize within-target: Raw MMP9 and MMP2 baselines differ due to protein concentration, staining efficiency, and TIMP3 affinity per target. Dividing by TIMP3-WT for each target independently isolates construct-level effects from between-target scale differences.</a:t>
+            </a:r>
+          </a:p>
+          <a:p>
+            <a:pPr/>
+            <a:r>
+              <a:t>Key constructs vs TIMP3-WT (Norm Bind Med):</a:t>
+            </a:r>
+          </a:p>
+          <a:p>
+            <a:pPr/>
+            <a:r>
+              <a:t>Construct</a:t>
+            </a:r>
+          </a:p>
+          <a:p>
+            <a:pPr/>
+            <a:r>
+              <a:t>MMP9</a:t>
+            </a:r>
+          </a:p>
+          <a:p>
+            <a:pPr/>
+            <a:r>
+              <a:t>MMP2</a:t>
+            </a:r>
+          </a:p>
+          <a:p>
+            <a:pPr/>
+            <a:r>
+              <a:t>C 120.990.88</a:t>
+            </a:r>
+          </a:p>
+          <a:p>
+            <a:pPr/>
+            <a:r>
+              <a:t>C 150.920.89</a:t>
+            </a:r>
+          </a:p>
+          <a:p>
+            <a:pPr/>
+            <a:r>
+              <a:t>AB 60.850.78</a:t>
+            </a:r>
+          </a:p>
+          <a:p>
+            <a:pPr/>
+            <a:r>
+              <a:t>C 130.731.11</a:t>
+            </a:r>
+          </a:p>
+          <a:p>
+            <a:pPr/>
+            <a:r>
+              <a:t>TIMP 31.001.00</a:t>
+            </a:r>
+          </a:p>
+          <a:p>
+            <a:pPr/>
+            <a:r>
+              <a:t>Interpretation: Values near 1.0 = binding similar to TIMP3-WT for that target. Selectivity signal comes from the raw cross-target comparison — this normalized view confirms variants are not simply super-binders on every target.</a:t>
+            </a:r>
+          </a:p>
+        </p:txBody>
+      </p:sp>
+    </p:spTree>
+  </p:cSld>
+  <p:clrMapOvr>
+    <a:masterClrMapping/>
+  </p:clrMapOvr>
+</p:sld>
+</file>
+
+<file path=ppt/slides/slide33.xml><?xml version="1.0" encoding="utf-8"?>
+<p:sld xmlns:a="http://schemas.openxmlformats.org/drawingml/2006/main" xmlns:p="http://schemas.openxmlformats.org/presentationml/2006/main" xmlns:r="http://schemas.openxmlformats.org/officeDocument/2006/relationships">
+  <p:cSld>
+    <p:spTree>
+      <p:nvGrpSpPr>
+        <p:cNvPr id="1" name=""/>
+        <p:cNvGrpSpPr/>
+        <p:nvPr/>
+      </p:nvGrpSpPr>
+      <p:grpSpPr/>
+      <p:sp>
+        <p:nvSpPr>
+          <p:cNvPr id="2" name="Title 1"/>
+          <p:cNvSpPr>
+            <a:spLocks noGrp="1"/>
+          </p:cNvSpPr>
+          <p:nvPr>
+            <p:ph type="title"/>
+          </p:nvPr>
+        </p:nvSpPr>
+        <p:spPr/>
+        <p:txBody>
+          <a:bodyPr/>
+          <a:lstStyle/>
+          <a:p/>
+        </p:txBody>
+      </p:sp>
+      <p:sp>
+        <p:nvSpPr>
+          <p:cNvPr id="3" name="Content Placeholder 2"/>
+          <p:cNvSpPr>
+            <a:spLocks noGrp="1"/>
+          </p:cNvSpPr>
+          <p:nvPr>
+            <p:ph idx="1"/>
+          </p:nvPr>
+        </p:nvSpPr>
+        <p:spPr/>
+        <p:txBody>
+          <a:bodyPr wrap="square"/>
+          <a:lstStyle/>
+          <a:p/>
+          <a:p>
+            <a:pPr/>
+            <a:r>
+              <a:t>layout: default</a:t>
+            </a:r>
+          </a:p>
+          <a:p>
+            <a:pPr/>
+            <a:r>
+              <a:t>transition: fade-out</a:t>
+            </a:r>
+          </a:p>
+        </p:txBody>
+      </p:sp>
+    </p:spTree>
+  </p:cSld>
+  <p:clrMapOvr>
+    <a:masterClrMapping/>
+  </p:clrMapOvr>
+</p:sld>
+</file>
+
+<file path=ppt/slides/slide34.xml><?xml version="1.0" encoding="utf-8"?>
+<p:sld xmlns:a="http://schemas.openxmlformats.org/drawingml/2006/main" xmlns:p="http://schemas.openxmlformats.org/presentationml/2006/main" xmlns:r="http://schemas.openxmlformats.org/officeDocument/2006/relationships">
+  <p:cSld>
+    <p:spTree>
+      <p:nvGrpSpPr>
+        <p:cNvPr id="1" name=""/>
+        <p:cNvGrpSpPr/>
+        <p:nvPr/>
+      </p:nvGrpSpPr>
+      <p:grpSpPr/>
+      <p:sp>
+        <p:nvSpPr>
+          <p:cNvPr id="2" name="Title 1"/>
+          <p:cNvSpPr>
+            <a:spLocks noGrp="1"/>
+          </p:cNvSpPr>
+          <p:nvPr>
+            <p:ph type="title"/>
+          </p:nvPr>
+        </p:nvSpPr>
+        <p:spPr/>
+        <p:txBody>
+          <a:bodyPr/>
+          <a:lstStyle/>
+          <a:p>
+            <a:r>
+              <a:t>Secondary Metric: Binding Efficiency (DP/FITC+)</a:t>
+            </a:r>
+          </a:p>
+        </p:txBody>
+      </p:sp>
+      <p:sp>
+        <p:nvSpPr>
+          <p:cNvPr id="3" name="Content Placeholder 2"/>
+          <p:cNvSpPr>
+            <a:spLocks noGrp="1"/>
+          </p:cNvSpPr>
+          <p:nvPr>
+            <p:ph idx="1"/>
+          </p:nvPr>
+        </p:nvSpPr>
+        <p:spPr/>
+        <p:txBody>
+          <a:bodyPr wrap="square"/>
+          <a:lstStyle/>
+          <a:p/>
+          <a:p>
+            <a:pPr/>
+            <a:r>
+              <a:t>Cross-target comparable fraction metric — primary selectivity proof.</a:t>
+            </a:r>
+          </a:p>
+          <a:p>
+            <a:pPr/>
+            <a:r>
+              <a:t>Definition</a:t>
+            </a:r>
+          </a:p>
+          <a:p>
+            <a:pPr/>
+            <a:r>
+              <a:t>Binding Efficiency =</a:t>
+            </a:r>
+          </a:p>
+          <a:p>
+            <a:pPr/>
+            <a:r>
+              <a:t>&amp;nbsp;&amp;nbsp;%DP / %Expr+ = N(Q2) / N(Q1+Q2)</a:t>
+            </a:r>
+          </a:p>
+          <a:p>
+            <a:pPr/>
+            <a:r>
+              <a:t>Of the cells successfully displaying the variant (FITC+), what fraction</a:t>
+            </a:r>
+          </a:p>
+          <a:p>
+            <a:pPr/>
+            <a:r>
+              <a:t>also show detectable target binding (APC+)? Denominator is expression-normalized,</a:t>
+            </a:r>
+          </a:p>
+          <a:p>
+            <a:pPr/>
+            <a:r>
+              <a:t>making it directly comparable across targets and trials.</a:t>
+            </a:r>
+          </a:p>
+          <a:p>
+            <a:pPr/>
+            <a:r>
+              <a:t>Cross-target comparable because the FITC</a:t>
+            </a:r>
+          </a:p>
+          <a:p>
+            <a:pPr/>
+            <a:r>
+              <a:t>antibody (anti-Myc) is target-independent. The denominator is the same</a:t>
+            </a:r>
+          </a:p>
+          <a:p>
+            <a:pPr/>
+            <a:r>
+              <a:t>cell population regardless of which MMP is added. This makes MMP9 vs MMP2</a:t>
+            </a:r>
+          </a:p>
+          <a:p>
+            <a:pPr/>
+            <a:r>
+              <a:t>Binding Efficiency values directly comparable.</a:t>
+            </a:r>
+          </a:p>
+          <a:p>
+            <a:pPr/>
+            <a:r>
+              <a:t>Selectivity Results</a:t>
+            </a:r>
+          </a:p>
+          <a:p>
+            <a:pPr/>
+            <a:r>
+              <a:t>Construct</a:t>
+            </a:r>
+          </a:p>
+          <a:p>
+            <a:pPr/>
+            <a:r>
+              <a:t>MMP2</a:t>
+            </a:r>
+          </a:p>
+          <a:p>
+            <a:pPr/>
+            <a:r>
+              <a:t>MMP9</a:t>
+            </a:r>
+          </a:p>
+          <a:p>
+            <a:pPr/>
+            <a:r>
+              <a:t>Ratio</a:t>
+            </a:r>
+          </a:p>
+          <a:p>
+            <a:pPr/>
+            <a:r>
+              <a:t>Result</a:t>
+            </a:r>
+          </a:p>
+          <a:p>
+            <a:pPr/>
+            <a:r>
+              <a:t>C 12</a:t>
+            </a:r>
+          </a:p>
+          <a:p>
+            <a:pPr/>
+            <a:r>
+              <a:t>32.1%</a:t>
+            </a:r>
+          </a:p>
+          <a:p>
+            <a:pPr/>
+            <a:r>
+              <a:t>91.3%</a:t>
+            </a:r>
+          </a:p>
+          <a:p>
+            <a:pPr/>
+            <a:r>
+              <a:t>2.8×</a:t>
+            </a:r>
+          </a:p>
+          <a:p>
+            <a:pPr/>
+            <a:r>
+              <a:t>✓ **</a:t>
+            </a:r>
+          </a:p>
+          <a:p>
+            <a:pPr/>
+            <a:r>
+              <a:t>C 15</a:t>
+            </a:r>
+          </a:p>
+          <a:p>
+            <a:pPr/>
+            <a:r>
+              <a:t>33.8%</a:t>
+            </a:r>
+          </a:p>
+          <a:p>
+            <a:pPr/>
+            <a:r>
+              <a:t>88.6%</a:t>
+            </a:r>
+          </a:p>
+          <a:p>
+            <a:pPr/>
+            <a:r>
+              <a:t>2.6×</a:t>
+            </a:r>
+          </a:p>
+          <a:p>
+            <a:pPr/>
+            <a:r>
+              <a:t>✓ *</a:t>
+            </a:r>
+          </a:p>
+          <a:p>
+            <a:pPr/>
+            <a:r>
+              <a:t>AB 6</a:t>
+            </a:r>
+          </a:p>
+          <a:p>
+            <a:pPr/>
+            <a:r>
+              <a:t>23.8%</a:t>
+            </a:r>
+          </a:p>
+          <a:p>
+            <a:pPr/>
+            <a:r>
+              <a:t>89.9%</a:t>
+            </a:r>
+          </a:p>
+          <a:p>
+            <a:pPr/>
+            <a:r>
+              <a:t>3.8×</a:t>
+            </a:r>
+          </a:p>
+          <a:p>
+            <a:pPr/>
+            <a:r>
+              <a:t>✓ ***</a:t>
+            </a:r>
+          </a:p>
+          <a:p>
+            <a:pPr/>
+            <a:r>
+              <a:t>C 13</a:t>
+            </a:r>
+          </a:p>
+          <a:p>
+            <a:pPr/>
+            <a:r>
+              <a:t>16.0%</a:t>
+            </a:r>
+          </a:p>
+          <a:p>
+            <a:pPr/>
+            <a:r>
+              <a:t>45.4%</a:t>
+            </a:r>
+          </a:p>
+          <a:p>
+            <a:pPr/>
+            <a:r>
+              <a:t>—</a:t>
+            </a:r>
+          </a:p>
+          <a:p>
+            <a:pPr/>
+            <a:r>
+              <a:t>n.s. ✓</a:t>
+            </a:r>
+          </a:p>
+          <a:p>
+            <a:pPr/>
+            <a:r>
+              <a:t>AB 5</a:t>
+            </a:r>
+          </a:p>
+          <a:p>
+            <a:pPr/>
+            <a:r>
+              <a:t>11.8%</a:t>
+            </a:r>
+          </a:p>
+          <a:p>
+            <a:pPr/>
+            <a:r>
+              <a:t>37.6%</a:t>
+            </a:r>
+          </a:p>
+          <a:p>
+            <a:pPr/>
+            <a:r>
+              <a:t>—</a:t>
+            </a:r>
+          </a:p>
+          <a:p>
+            <a:pPr/>
+            <a:r>
+              <a:t>n.s. ✓</a:t>
+            </a:r>
+          </a:p>
+          <a:p>
+            <a:pPr/>
+            <a:r>
+              <a:t>TIMP 3</a:t>
+            </a:r>
+          </a:p>
+          <a:p>
+            <a:pPr/>
+            <a:r>
+              <a:t>21.9%</a:t>
+            </a:r>
+          </a:p>
+          <a:p>
+            <a:pPr/>
+            <a:r>
+              <a:t>54.5%</a:t>
+            </a:r>
+          </a:p>
+          <a:p>
+            <a:pPr/>
+            <a:r>
+              <a:t>2.5×</a:t>
+            </a:r>
+          </a:p>
+          <a:p>
+            <a:pPr/>
+            <a:r>
+              <a:t>ref *</a:t>
+            </a:r>
+          </a:p>
+          <a:p>
+            <a:pPr/>
+            <a:r>
+              <a:t>p&amp;lt;0.05, ** p&amp;lt;0.01, *** p&amp;lt;0.001 (Tukey-HSD, MMP9 vs MMP2 pair)</a:t>
+            </a:r>
+          </a:p>
+        </p:txBody>
+      </p:sp>
+    </p:spTree>
+  </p:cSld>
+  <p:clrMapOvr>
+    <a:masterClrMapping/>
+  </p:clrMapOvr>
+</p:sld>
+</file>
+
+<file path=ppt/slides/slide35.xml><?xml version="1.0" encoding="utf-8"?>
+<p:sld xmlns:a="http://schemas.openxmlformats.org/drawingml/2006/main" xmlns:p="http://schemas.openxmlformats.org/presentationml/2006/main" xmlns:r="http://schemas.openxmlformats.org/officeDocument/2006/relationships">
+  <p:cSld>
+    <p:spTree>
+      <p:nvGrpSpPr>
+        <p:cNvPr id="1" name=""/>
+        <p:cNvGrpSpPr/>
+        <p:nvPr/>
+      </p:nvGrpSpPr>
+      <p:grpSpPr/>
+      <p:sp>
+        <p:nvSpPr>
+          <p:cNvPr id="2" name="Title 1"/>
+          <p:cNvSpPr>
+            <a:spLocks noGrp="1"/>
+          </p:cNvSpPr>
+          <p:nvPr>
+            <p:ph type="title"/>
+          </p:nvPr>
+        </p:nvSpPr>
+        <p:spPr/>
+        <p:txBody>
+          <a:bodyPr/>
+          <a:lstStyle/>
+          <a:p/>
+        </p:txBody>
+      </p:sp>
+      <p:sp>
+        <p:nvSpPr>
+          <p:cNvPr id="3" name="Content Placeholder 2"/>
+          <p:cNvSpPr>
+            <a:spLocks noGrp="1"/>
+          </p:cNvSpPr>
+          <p:nvPr>
+            <p:ph idx="1"/>
+          </p:nvPr>
+        </p:nvSpPr>
+        <p:spPr/>
+        <p:txBody>
+          <a:bodyPr wrap="square"/>
+          <a:lstStyle/>
+          <a:p/>
+          <a:p>
+            <a:pPr/>
+            <a:r>
+              <a:t>layout: default</a:t>
+            </a:r>
+          </a:p>
+          <a:p>
+            <a:pPr/>
+            <a:r>
+              <a:t>transition: fade-out</a:t>
+            </a:r>
+          </a:p>
+        </p:txBody>
+      </p:sp>
+    </p:spTree>
+  </p:cSld>
+  <p:clrMapOvr>
+    <a:masterClrMapping/>
+  </p:clrMapOvr>
+</p:sld>
+</file>
+
+<file path=ppt/slides/slide36.xml><?xml version="1.0" encoding="utf-8"?>
+<p:sld xmlns:a="http://schemas.openxmlformats.org/drawingml/2006/main" xmlns:p="http://schemas.openxmlformats.org/presentationml/2006/main" xmlns:r="http://schemas.openxmlformats.org/officeDocument/2006/relationships">
+  <p:cSld>
+    <p:spTree>
+      <p:nvGrpSpPr>
+        <p:cNvPr id="1" name=""/>
+        <p:cNvGrpSpPr/>
+        <p:nvPr/>
+      </p:nvGrpSpPr>
+      <p:grpSpPr/>
+      <p:sp>
+        <p:nvSpPr>
+          <p:cNvPr id="2" name="Title 1"/>
+          <p:cNvSpPr>
+            <a:spLocks noGrp="1"/>
+          </p:cNvSpPr>
+          <p:nvPr>
+            <p:ph type="title"/>
+          </p:nvPr>
+        </p:nvSpPr>
+        <p:spPr/>
+        <p:txBody>
+          <a:bodyPr/>
+          <a:lstStyle/>
+          <a:p>
+            <a:r>
+              <a:t>Positive Median Ratio — Cross-Target Comparison</a:t>
+            </a:r>
+          </a:p>
+        </p:txBody>
+      </p:sp>
+      <p:sp>
+        <p:nvSpPr>
+          <p:cNvPr id="3" name="Content Placeholder 2"/>
+          <p:cNvSpPr>
+            <a:spLocks noGrp="1"/>
+          </p:cNvSpPr>
+          <p:nvPr>
+            <p:ph idx="1"/>
+          </p:nvPr>
+        </p:nvSpPr>
+        <p:spPr/>
+        <p:txBody>
+          <a:bodyPr wrap="square"/>
+          <a:lstStyle/>
+          <a:p/>
+          <a:p>
+            <a:pPr/>
+            <a:r>
+              <a:t>APC/FITC ratio for FITC+ cells. Click group buttons to switch target pairs.</a:t>
+            </a:r>
+          </a:p>
+          <a:p>
+            <a:pPr/>
+            <a:r>
+              <a:t>Bind Med (Expr+)</a:t>
+            </a:r>
+          </a:p>
+          <a:p>
+            <a:pPr/>
+            <a:r>
+              <a:t>Raw APC-A intensity in expressors. Cross-target comparable. Primary poster metric.</a:t>
+            </a:r>
+          </a:p>
+          <a:p>
+            <a:pPr/>
+            <a:r>
+              <a:t>Binding Efficiency</a:t>
+            </a:r>
+          </a:p>
+          <a:p>
+            <a:pPr/>
+            <a:r>
+              <a:t>Fraction of expressors that bind. Cross-target. Primary selectivity proof.</a:t>
+            </a:r>
+          </a:p>
+          <a:p>
+            <a:pPr/>
+            <a:r>
+              <a:t>Norm Median Ratio</a:t>
+            </a:r>
+          </a:p>
+          <a:p>
+            <a:pPr/>
+            <a:r>
+              <a:t>APC/FITC ratio, WT-normed. Corrects for expression-level variation.</a:t>
+            </a:r>
+          </a:p>
+          <a:p>
+            <a:pPr/>
+            <a:r>
+              <a:t>Norm IWB Index</a:t>
+            </a:r>
+          </a:p>
+          <a:p>
+            <a:pPr/>
+            <a:r>
+              <a:t>Per-cell binding quality in DP population. Sensitive to threshold-crossing cells only.</a:t>
+            </a:r>
+          </a:p>
+        </p:txBody>
+      </p:sp>
+    </p:spTree>
+  </p:cSld>
+  <p:clrMapOvr>
+    <a:masterClrMapping/>
+  </p:clrMapOvr>
+</p:sld>
+</file>
+
+<file path=ppt/slides/slide37.xml><?xml version="1.0" encoding="utf-8"?>
+<p:sld xmlns:a="http://schemas.openxmlformats.org/drawingml/2006/main" xmlns:p="http://schemas.openxmlformats.org/presentationml/2006/main" xmlns:r="http://schemas.openxmlformats.org/officeDocument/2006/relationships">
+  <p:cSld>
+    <p:spTree>
+      <p:nvGrpSpPr>
+        <p:cNvPr id="1" name=""/>
+        <p:cNvGrpSpPr/>
+        <p:nvPr/>
+      </p:nvGrpSpPr>
+      <p:grpSpPr/>
+      <p:sp>
+        <p:nvSpPr>
+          <p:cNvPr id="2" name="Title 1"/>
+          <p:cNvSpPr>
+            <a:spLocks noGrp="1"/>
+          </p:cNvSpPr>
+          <p:nvPr>
+            <p:ph type="title"/>
+          </p:nvPr>
+        </p:nvSpPr>
+        <p:spPr/>
+        <p:txBody>
+          <a:bodyPr/>
+          <a:lstStyle/>
+          <a:p/>
+        </p:txBody>
+      </p:sp>
+      <p:sp>
+        <p:nvSpPr>
+          <p:cNvPr id="3" name="Content Placeholder 2"/>
+          <p:cNvSpPr>
+            <a:spLocks noGrp="1"/>
+          </p:cNvSpPr>
+          <p:nvPr>
+            <p:ph idx="1"/>
+          </p:nvPr>
+        </p:nvSpPr>
+        <p:spPr/>
+        <p:txBody>
+          <a:bodyPr wrap="square"/>
+          <a:lstStyle/>
+          <a:p/>
+          <a:p>
+            <a:pPr/>
+            <a:r>
+              <a:t>layout: default</a:t>
+            </a:r>
+          </a:p>
+          <a:p>
+            <a:pPr/>
+            <a:r>
+              <a:t>transition: fade-out</a:t>
+            </a:r>
+          </a:p>
+        </p:txBody>
+      </p:sp>
+    </p:spTree>
+  </p:cSld>
+  <p:clrMapOvr>
+    <a:masterClrMapping/>
+  </p:clrMapOvr>
+</p:sld>
+</file>
+
+<file path=ppt/slides/slide38.xml><?xml version="1.0" encoding="utf-8"?>
+<p:sld xmlns:a="http://schemas.openxmlformats.org/drawingml/2006/main" xmlns:p="http://schemas.openxmlformats.org/presentationml/2006/main" xmlns:r="http://schemas.openxmlformats.org/officeDocument/2006/relationships">
+  <p:cSld>
+    <p:spTree>
+      <p:nvGrpSpPr>
+        <p:cNvPr id="1" name=""/>
+        <p:cNvGrpSpPr/>
+        <p:nvPr/>
+      </p:nvGrpSpPr>
+      <p:grpSpPr/>
+      <p:sp>
+        <p:nvSpPr>
+          <p:cNvPr id="2" name="Title 1"/>
+          <p:cNvSpPr>
+            <a:spLocks noGrp="1"/>
+          </p:cNvSpPr>
+          <p:nvPr>
+            <p:ph type="title"/>
+          </p:nvPr>
+        </p:nvSpPr>
+        <p:spPr/>
+        <p:txBody>
+          <a:bodyPr/>
+          <a:lstStyle/>
+          <a:p>
+            <a:r>
+              <a:t>Key Findings: 3 of 4 Predictions Confirmed</a:t>
+            </a:r>
+          </a:p>
+        </p:txBody>
+      </p:sp>
+      <p:sp>
+        <p:nvSpPr>
+          <p:cNvPr id="3" name="Content Placeholder 2"/>
+          <p:cNvSpPr>
+            <a:spLocks noGrp="1"/>
+          </p:cNvSpPr>
+          <p:nvPr>
+            <p:ph idx="1"/>
+          </p:nvPr>
+        </p:nvSpPr>
+        <p:spPr/>
+        <p:txBody>
+          <a:bodyPr wrap="square"/>
+          <a:lstStyle/>
+          <a:p/>
+          <a:p>
+            <a:pPr/>
+            <a:r>
+              <a:t>75% PPV — strong given the vast sequence landscape. Every control non-significant.</a:t>
+            </a:r>
+          </a:p>
+          <a:p>
+            <a:pPr/>
+            <a:r>
+              <a:t>Positive Outcomes (3/4 Predicted Selective)</a:t>
+            </a:r>
+          </a:p>
+          <a:p>
+            <a:pPr/>
+            <a:r>
+              <a:t>01</a:t>
+            </a:r>
+          </a:p>
+          <a:p>
+            <a:pPr/>
+            <a:r>
+              <a:t>3 of 4 Selective Confirmed: C 12 (p=0.012), C 15 (p=0.018), AB 6 (p=0.0002) confirmed by ANOVA + Tukey-HSD. Selectivity ratios 2.6–3.8× vs TIMP3-WT baseline (2.5×). AB 1 showed directional preference but ANOVA non-significant due to high trial-to-trial variance (σ = 43%).</a:t>
+            </a:r>
+          </a:p>
+          <a:p>
+            <a:pPr/>
+            <a:r>
+              <a:t>02</a:t>
+            </a:r>
+          </a:p>
+          <a:p>
+            <a:pPr/>
+            <a:r>
+              <a:t>Zero False Positives: All 4 non-selective control constructs (C 13, AB 5, AB 2, AB 3) showed non-significant ANOVA (p &gt; 0.05) — validating the T-score filter's specificity, not just sensitivity.</a:t>
+            </a:r>
+          </a:p>
+          <a:p>
+            <a:pPr/>
+            <a:r>
+              <a:t>03</a:t>
+            </a:r>
+          </a:p>
+          <a:p>
+            <a:pPr/>
+            <a:r>
+              <a:t>Scaffold Plasticity Confirmed: 6–15 aa loop insertions tolerated structurally and biologically. WT TIMP3 itself shows MMP9 preference (p=0.024) — engineered variants amplify a native preference.</a:t>
+            </a:r>
+          </a:p>
+          <a:p>
+            <a:pPr/>
+            <a:r>
+              <a:t>Pipeline Validation Logic</a:t>
+            </a:r>
+          </a:p>
+          <a:p>
+            <a:pPr/>
+            <a:r>
+              <a:t>Context for 75% PPV: Binders are not 50/50 by chance — the background rate of a randomly chosen sequence being both functional on yeast display AND MMP9-selective is far below 75%. Three statistically confirmed predictions from four targeted designs is a strong result against that baseline.</a:t>
+            </a:r>
+          </a:p>
+          <a:p>
+            <a:pPr/>
+            <a:r>
+              <a:t>Bidirectional concordance: 0 false positives in the non-selective set. A filter that only gets selective constructs right might be too lenient — confirmed true negatives validate the filter's specificity, not just sensitivity.</a:t>
+            </a:r>
+          </a:p>
+          <a:p>
+            <a:pPr/>
+            <a:r>
+              <a:t>Platform implication: 75% PPV at N=4 with 0 FP at N=4 justifies SPR kinetic characterization and next-cycle loop redesign without experimental redesign of the gating or statistical framework.</a:t>
+            </a:r>
+          </a:p>
+        </p:txBody>
+      </p:sp>
+    </p:spTree>
+  </p:cSld>
+  <p:clrMapOvr>
+    <a:masterClrMapping/>
+  </p:clrMapOvr>
+</p:sld>
+</file>
+
+<file path=ppt/slides/slide39.xml><?xml version="1.0" encoding="utf-8"?>
+<p:sld xmlns:a="http://schemas.openxmlformats.org/drawingml/2006/main" xmlns:p="http://schemas.openxmlformats.org/presentationml/2006/main" xmlns:r="http://schemas.openxmlformats.org/officeDocument/2006/relationships">
+  <p:cSld>
+    <p:spTree>
+      <p:nvGrpSpPr>
+        <p:cNvPr id="1" name=""/>
+        <p:cNvGrpSpPr/>
+        <p:nvPr/>
+      </p:nvGrpSpPr>
+      <p:grpSpPr/>
+      <p:sp>
+        <p:nvSpPr>
+          <p:cNvPr id="2" name="Title 1"/>
+          <p:cNvSpPr>
+            <a:spLocks noGrp="1"/>
+          </p:cNvSpPr>
+          <p:nvPr>
+            <p:ph type="title"/>
+          </p:nvPr>
+        </p:nvSpPr>
+        <p:spPr/>
+        <p:txBody>
+          <a:bodyPr/>
+          <a:lstStyle/>
+          <a:p/>
+        </p:txBody>
+      </p:sp>
+      <p:sp>
+        <p:nvSpPr>
+          <p:cNvPr id="3" name="Content Placeholder 2"/>
+          <p:cNvSpPr>
+            <a:spLocks noGrp="1"/>
+          </p:cNvSpPr>
+          <p:nvPr>
+            <p:ph idx="1"/>
+          </p:nvPr>
+        </p:nvSpPr>
+        <p:spPr/>
+        <p:txBody>
+          <a:bodyPr wrap="square"/>
+          <a:lstStyle/>
+          <a:p/>
+          <a:p>
+            <a:pPr/>
+            <a:r>
+              <a:t>layout: default</a:t>
+            </a:r>
+          </a:p>
+          <a:p>
+            <a:pPr/>
+            <a:r>
+              <a:t>transition: fade-out</a:t>
+            </a:r>
+          </a:p>
+        </p:txBody>
+      </p:sp>
+    </p:spTree>
+  </p:cSld>
+  <p:clrMapOvr>
+    <a:masterClrMapping/>
+  </p:clrMapOvr>
+</p:sld>
+</file>
+
 <file path=ppt/slides/slide4.xml><?xml version="1.0" encoding="utf-8"?>
 <p:sld xmlns:a="http://schemas.openxmlformats.org/drawingml/2006/main" xmlns:p="http://schemas.openxmlformats.org/presentationml/2006/main" xmlns:r="http://schemas.openxmlformats.org/officeDocument/2006/relationships">
   <p:cSld>
@@ -4537,7 +6302,7 @@
           <a:lstStyle/>
           <a:p>
             <a:r>
-              <a:t>Workflow Architecture</a:t>
+              <a:t>The Problem: Near-Identical Active Sites, Opposite Clinical Roles</a:t>
             </a:r>
           </a:p>
         </p:txBody>
@@ -4560,55 +6325,903 @@
           <a:p>
             <a:pPr/>
             <a:r>
-              <a:t>The integration of generative modeling and high-throughput experimental screening.</a:t>
-            </a:r>
-          </a:p>
-          <a:p>
-            <a:pPr/>
-            <a:r>
-              <a:t>Computational Phase</a:t>
-            </a:r>
-          </a:p>
-          <a:p>
-            <a:pPr/>
-            <a:r>
-              <a:t>— Loop-centric RFdiffusion on catalytic domains</a:t>
-            </a:r>
-          </a:p>
-          <a:p>
-            <a:pPr/>
-            <a:r>
-              <a:t>— Sequence optimization via ProteinMPNN</a:t>
-            </a:r>
-          </a:p>
-          <a:p>
-            <a:pPr/>
-            <a:r>
-              <a:t>— Z-score filtering of AlphaFold ensemble predictions</a:t>
-            </a:r>
-          </a:p>
-          <a:p>
-            <a:pPr/>
-            <a:r>
-              <a:t>Experimental Phase</a:t>
-            </a:r>
-          </a:p>
-          <a:p>
-            <a:pPr/>
-            <a:r>
-              <a:t>— Golden Gate assembly of design libraries</a:t>
-            </a:r>
-          </a:p>
-          <a:p>
-            <a:pPr/>
-            <a:r>
-              <a:t>— Multiplexed Yeast Surface Display titration</a:t>
-            </a:r>
-          </a:p>
-          <a:p>
-            <a:pPr/>
-            <a:r>
-              <a:t>— Automated FCS affinity and specificity profiling</a:t>
+              <a:t>MMP9 — Pathogenic</a:t>
+            </a:r>
+          </a:p>
+          <a:p>
+            <a:pPr/>
+            <a:r>
+              <a:t>→ Basement membrane degradation → tumor intravasation</a:t>
+            </a:r>
+          </a:p>
+          <a:p>
+            <a:pPr/>
+            <a:r>
+              <a:t>→ Releases ECM-sequestered VEGF → angiogenesis</a:t>
+            </a:r>
+          </a:p>
+          <a:p>
+            <a:pPr/>
+            <a:r>
+              <a:t>→ Overexpressed in &gt;15 solid tumor types</a:t>
+            </a:r>
+          </a:p>
+          <a:p>
+            <a:pPr/>
+            <a:r>
+              <a:t>→ Correlates with metastasis and poor prognosis</a:t>
+            </a:r>
+          </a:p>
+          <a:p>
+            <a:pPr/>
+            <a:r>
+              <a:t>MMP2 — Homeostatic</a:t>
+            </a:r>
+          </a:p>
+          <a:p>
+            <a:pPr/>
+            <a:r>
+              <a:t>→ Normal connective tissue maintenance</a:t>
+            </a:r>
+          </a:p>
+          <a:p>
+            <a:pPr/>
+            <a:r>
+              <a:t>→ Vascular remodeling in healthy tissue</a:t>
+            </a:r>
+          </a:p>
+          <a:p>
+            <a:pPr/>
+            <a:r>
+              <a:t>→ Inhibition → musculoskeletal toxicity</a:t>
+            </a:r>
+          </a:p>
+          <a:p>
+            <a:pPr/>
+            <a:r>
+              <a:t>→ 65% catalytic domain identity with MMP9</a:t>
+            </a:r>
+          </a:p>
+          <a:p>
+            <a:pPr/>
+            <a:r>
+              <a:t>Why TIMP3?</a:t>
+            </a:r>
+          </a:p>
+          <a:p>
+            <a:pPr/>
+            <a:r>
+              <a:t>TIMP3 naturally inhibits metalloproteinases via three N-terminal reactive loops (AB, C, EF).</a:t>
+            </a:r>
+          </a:p>
+          <a:p>
+            <a:pPr/>
+            <a:r>
+              <a:t>Its β-barrel scaffold tolerates loop insertions of 6–15 aa while retaining fold stability —</a:t>
+            </a:r>
+          </a:p>
+          <a:p>
+            <a:pPr/>
+            <a:r>
+              <a:t>making it ideal for loop-level precision engineering.</a:t>
+            </a:r>
+          </a:p>
+          <a:p>
+            <a:pPr/>
+            <a:r>
+              <a:t>Our Approach</a:t>
+            </a:r>
+          </a:p>
+          <a:p>
+            <a:pPr/>
+            <a:r>
+              <a:t>Generative AI de novo redesigns the AB and C loops to amplify MMP9 preference over MMP2.</a:t>
+            </a:r>
+          </a:p>
+          <a:p>
+            <a:pPr/>
+            <a:r>
+              <a:t>Computationally selected from &gt;1,000 candidates, then experimentally validated via</a:t>
+            </a:r>
+          </a:p>
+          <a:p>
+            <a:pPr/>
+            <a:r>
+              <a:t>yeast surface display and flow cytometry.</a:t>
+            </a:r>
+          </a:p>
+        </p:txBody>
+      </p:sp>
+    </p:spTree>
+  </p:cSld>
+  <p:clrMapOvr>
+    <a:masterClrMapping/>
+  </p:clrMapOvr>
+</p:sld>
+</file>
+
+<file path=ppt/slides/slide40.xml><?xml version="1.0" encoding="utf-8"?>
+<p:sld xmlns:a="http://schemas.openxmlformats.org/drawingml/2006/main" xmlns:p="http://schemas.openxmlformats.org/presentationml/2006/main" xmlns:r="http://schemas.openxmlformats.org/officeDocument/2006/relationships">
+  <p:cSld>
+    <p:spTree>
+      <p:nvGrpSpPr>
+        <p:cNvPr id="1" name=""/>
+        <p:cNvGrpSpPr/>
+        <p:nvPr/>
+      </p:nvGrpSpPr>
+      <p:grpSpPr/>
+      <p:sp>
+        <p:nvSpPr>
+          <p:cNvPr id="2" name="Title 1"/>
+          <p:cNvSpPr>
+            <a:spLocks noGrp="1"/>
+          </p:cNvSpPr>
+          <p:nvPr>
+            <p:ph type="title"/>
+          </p:nvPr>
+        </p:nvSpPr>
+        <p:spPr/>
+        <p:txBody>
+          <a:bodyPr/>
+          <a:lstStyle/>
+          <a:p>
+            <a:r>
+              <a:t>Next Steps and Translational Vision</a:t>
+            </a:r>
+          </a:p>
+        </p:txBody>
+      </p:sp>
+      <p:sp>
+        <p:nvSpPr>
+          <p:cNvPr id="3" name="Content Placeholder 2"/>
+          <p:cNvSpPr>
+            <a:spLocks noGrp="1"/>
+          </p:cNvSpPr>
+          <p:nvPr>
+            <p:ph idx="1"/>
+          </p:nvPr>
+        </p:nvSpPr>
+        <p:spPr/>
+        <p:txBody>
+          <a:bodyPr wrap="square"/>
+          <a:lstStyle/>
+          <a:p/>
+          <a:p>
+            <a:pPr/>
+            <a:r>
+              <a:t>Near-Term Experiments</a:t>
+            </a:r>
+          </a:p>
+          <a:p>
+            <a:pPr/>
+            <a:r>
+              <a:t>SPR Kinetics: KD, kon, koff for C 12, C 15, AB 6 vs purified MMP9 and MMP2. Absolute affinities enable direct comparison to marimastat/prinomastat clinical benchmarks.</a:t>
+            </a:r>
+          </a:p>
+          <a:p>
+            <a:pPr/>
+            <a:r>
+              <a:t>Reverse Selectivity (MMP2 &gt; MMP9): Demonstrates controllable pipeline steering. If the same pipeline produces MMP2-preferring variants on demand, selectivity is engineerable in either direction — not an artifact of the TIMP3 scaffold.</a:t>
+            </a:r>
+          </a:p>
+          <a:p>
+            <a:pPr/>
+            <a:r>
+              <a:t>ADAM10 Protocol Optimization: Titrate antibody concentration and induction time to achieve sufficient positive control signal; enables ADAM17/ADAM10 selectivity analysis with identical ANOVA framework.</a:t>
+            </a:r>
+          </a:p>
+          <a:p>
+            <a:pPr/>
+            <a:r>
+              <a:t>ESM-2 Saturation Mutagenesis: Per-residue fitness landscape for all positions in C 12, C 15, AB 6 loops — identify critical selectivity determinants and tolerant positions for second-round design.</a:t>
+            </a:r>
+          </a:p>
+          <a:p>
+            <a:pPr/>
+            <a:r>
+              <a:t>Translational Context</a:t>
+            </a:r>
+          </a:p>
+          <a:p>
+            <a:pPr/>
+            <a:r>
+              <a:t>MMP9 as oncology target: Overexpressed in &gt;15 solid tumor types; correlates with metastasis and poor prognosis. Prior pan-MMP inhibitors failed Phase III due to MMP2 off-target toxicity — not because MMP9 inhibition is wrong, but because selectivity was insufficient. An MMP9-specific TIMP3 variant addresses the actual failure mode.</a:t>
+            </a:r>
+          </a:p>
+          <a:p>
+            <a:pPr/>
+            <a:r>
+              <a:t>Target-agnostic framework: Any protein–protein interaction with available structural data is addressable by this pipeline. MMP9/MMP2 is the validation case; the computational workflow is identical for kinase isoforms, cytokine receptors, or viral surface proteins.</a:t>
+            </a:r>
+          </a:p>
+          <a:p>
+            <a:pPr/>
+            <a:r>
+              <a:t>Precision CAR-T analogy: Patient tumor genome → neoantigen identification → de novo binder generation → CAR construct with hyperspecific, genome-informed recognition. Combines precision genomics with AI-driven protein design to minimize on-target/off-tumor toxicity.</a:t>
+            </a:r>
+          </a:p>
+        </p:txBody>
+      </p:sp>
+    </p:spTree>
+  </p:cSld>
+  <p:clrMapOvr>
+    <a:masterClrMapping/>
+  </p:clrMapOvr>
+</p:sld>
+</file>
+
+<file path=ppt/slides/slide41.xml><?xml version="1.0" encoding="utf-8"?>
+<p:sld xmlns:a="http://schemas.openxmlformats.org/drawingml/2006/main" xmlns:p="http://schemas.openxmlformats.org/presentationml/2006/main" xmlns:r="http://schemas.openxmlformats.org/officeDocument/2006/relationships">
+  <p:cSld>
+    <p:spTree>
+      <p:nvGrpSpPr>
+        <p:cNvPr id="1" name=""/>
+        <p:cNvGrpSpPr/>
+        <p:nvPr/>
+      </p:nvGrpSpPr>
+      <p:grpSpPr/>
+      <p:sp>
+        <p:nvSpPr>
+          <p:cNvPr id="2" name="Title 1"/>
+          <p:cNvSpPr>
+            <a:spLocks noGrp="1"/>
+          </p:cNvSpPr>
+          <p:nvPr>
+            <p:ph type="title"/>
+          </p:nvPr>
+        </p:nvSpPr>
+        <p:spPr/>
+        <p:txBody>
+          <a:bodyPr/>
+          <a:lstStyle/>
+          <a:p/>
+        </p:txBody>
+      </p:sp>
+      <p:sp>
+        <p:nvSpPr>
+          <p:cNvPr id="3" name="Content Placeholder 2"/>
+          <p:cNvSpPr>
+            <a:spLocks noGrp="1"/>
+          </p:cNvSpPr>
+          <p:nvPr>
+            <p:ph idx="1"/>
+          </p:nvPr>
+        </p:nvSpPr>
+        <p:spPr/>
+        <p:txBody>
+          <a:bodyPr wrap="square"/>
+          <a:lstStyle/>
+          <a:p/>
+          <a:p>
+            <a:pPr/>
+            <a:r>
+              <a:t>layout: section</a:t>
+            </a:r>
+          </a:p>
+          <a:p>
+            <a:pPr/>
+            <a:r>
+              <a:t>transition: slide-up</a:t>
+            </a:r>
+          </a:p>
+        </p:txBody>
+      </p:sp>
+    </p:spTree>
+  </p:cSld>
+  <p:clrMapOvr>
+    <a:masterClrMapping/>
+  </p:clrMapOvr>
+</p:sld>
+</file>
+
+<file path=ppt/slides/slide42.xml><?xml version="1.0" encoding="utf-8"?>
+<p:sld xmlns:a="http://schemas.openxmlformats.org/drawingml/2006/main" xmlns:p="http://schemas.openxmlformats.org/presentationml/2006/main" xmlns:r="http://schemas.openxmlformats.org/officeDocument/2006/relationships">
+  <p:cSld>
+    <p:spTree>
+      <p:nvGrpSpPr>
+        <p:cNvPr id="1" name=""/>
+        <p:cNvGrpSpPr/>
+        <p:nvPr/>
+      </p:nvGrpSpPr>
+      <p:grpSpPr/>
+      <p:sp>
+        <p:nvSpPr>
+          <p:cNvPr id="2" name="Title 1"/>
+          <p:cNvSpPr>
+            <a:spLocks noGrp="1"/>
+          </p:cNvSpPr>
+          <p:nvPr>
+            <p:ph type="title"/>
+          </p:nvPr>
+        </p:nvSpPr>
+        <p:spPr/>
+        <p:txBody>
+          <a:bodyPr/>
+          <a:lstStyle/>
+          <a:p>
+            <a:r>
+              <a:t>Cross-Reactivity Panel</a:t>
+            </a:r>
+          </a:p>
+        </p:txBody>
+      </p:sp>
+      <p:sp>
+        <p:nvSpPr>
+          <p:cNvPr id="3" name="Content Placeholder 2"/>
+          <p:cNvSpPr>
+            <a:spLocks noGrp="1"/>
+          </p:cNvSpPr>
+          <p:nvPr>
+            <p:ph idx="1"/>
+          </p:nvPr>
+        </p:nvSpPr>
+        <p:spPr/>
+        <p:txBody>
+          <a:bodyPr wrap="square"/>
+          <a:lstStyle/>
+          <a:p/>
+          <a:p>
+            <a:pPr>
+              <a:defRPr b="1" sz="2400"/>
+            </a:pPr>
+            <a:r>
+              <a:t>TwistBio Constructs vs MMP1, MMP7, MMP8, MMP10</a:t>
+            </a:r>
+          </a:p>
+        </p:txBody>
+      </p:sp>
+    </p:spTree>
+  </p:cSld>
+  <p:clrMapOvr>
+    <a:masterClrMapping/>
+  </p:clrMapOvr>
+</p:sld>
+</file>
+
+<file path=ppt/slides/slide43.xml><?xml version="1.0" encoding="utf-8"?>
+<p:sld xmlns:a="http://schemas.openxmlformats.org/drawingml/2006/main" xmlns:p="http://schemas.openxmlformats.org/presentationml/2006/main" xmlns:r="http://schemas.openxmlformats.org/officeDocument/2006/relationships">
+  <p:cSld>
+    <p:spTree>
+      <p:nvGrpSpPr>
+        <p:cNvPr id="1" name=""/>
+        <p:cNvGrpSpPr/>
+        <p:nvPr/>
+      </p:nvGrpSpPr>
+      <p:grpSpPr/>
+      <p:sp>
+        <p:nvSpPr>
+          <p:cNvPr id="2" name="Title 1"/>
+          <p:cNvSpPr>
+            <a:spLocks noGrp="1"/>
+          </p:cNvSpPr>
+          <p:nvPr>
+            <p:ph type="title"/>
+          </p:nvPr>
+        </p:nvSpPr>
+        <p:spPr/>
+        <p:txBody>
+          <a:bodyPr/>
+          <a:lstStyle/>
+          <a:p/>
+        </p:txBody>
+      </p:sp>
+      <p:sp>
+        <p:nvSpPr>
+          <p:cNvPr id="3" name="Content Placeholder 2"/>
+          <p:cNvSpPr>
+            <a:spLocks noGrp="1"/>
+          </p:cNvSpPr>
+          <p:nvPr>
+            <p:ph idx="1"/>
+          </p:nvPr>
+        </p:nvSpPr>
+        <p:spPr/>
+        <p:txBody>
+          <a:bodyPr wrap="square"/>
+          <a:lstStyle/>
+          <a:p/>
+          <a:p>
+            <a:pPr/>
+            <a:r>
+              <a:t>layout: default</a:t>
+            </a:r>
+          </a:p>
+          <a:p>
+            <a:pPr/>
+            <a:r>
+              <a:t>transition: fade-out</a:t>
+            </a:r>
+          </a:p>
+        </p:txBody>
+      </p:sp>
+    </p:spTree>
+  </p:cSld>
+  <p:clrMapOvr>
+    <a:masterClrMapping/>
+  </p:clrMapOvr>
+</p:sld>
+</file>
+
+<file path=ppt/slides/slide44.xml><?xml version="1.0" encoding="utf-8"?>
+<p:sld xmlns:a="http://schemas.openxmlformats.org/drawingml/2006/main" xmlns:p="http://schemas.openxmlformats.org/presentationml/2006/main" xmlns:r="http://schemas.openxmlformats.org/officeDocument/2006/relationships">
+  <p:cSld>
+    <p:spTree>
+      <p:nvGrpSpPr>
+        <p:cNvPr id="1" name=""/>
+        <p:cNvGrpSpPr/>
+        <p:nvPr/>
+      </p:nvGrpSpPr>
+      <p:grpSpPr/>
+      <p:sp>
+        <p:nvSpPr>
+          <p:cNvPr id="2" name="Title 1"/>
+          <p:cNvSpPr>
+            <a:spLocks noGrp="1"/>
+          </p:cNvSpPr>
+          <p:nvPr>
+            <p:ph type="title"/>
+          </p:nvPr>
+        </p:nvSpPr>
+        <p:spPr/>
+        <p:txBody>
+          <a:bodyPr/>
+          <a:lstStyle/>
+          <a:p>
+            <a:r>
+              <a:t>Cross-Reactivity Binding Profile</a:t>
+            </a:r>
+          </a:p>
+        </p:txBody>
+      </p:sp>
+      <p:sp>
+        <p:nvSpPr>
+          <p:cNvPr id="3" name="Content Placeholder 2"/>
+          <p:cNvSpPr>
+            <a:spLocks noGrp="1"/>
+          </p:cNvSpPr>
+          <p:nvPr>
+            <p:ph idx="1"/>
+          </p:nvPr>
+        </p:nvSpPr>
+        <p:spPr/>
+        <p:txBody>
+          <a:bodyPr wrap="square"/>
+          <a:lstStyle/>
+          <a:p/>
+          <a:p>
+            <a:pPr/>
+            <a:r>
+              <a:t>Flow Cytometry assessment of TwistBio constructs against a multi-MMP panel.</a:t>
+            </a:r>
+          </a:p>
+          <a:p>
+            <a:pPr/>
+            <a:r>
+              <a:t>Observation: Weak Signal Across Panel</a:t>
+            </a:r>
+          </a:p>
+          <a:p>
+            <a:pPr/>
+            <a:r>
+              <a:t>All constructs (AB 3, 4, 6 and C 12) showed weak/minimal binding across all tested targets (MMP1, 7, 8, 10). The average binding fold change was ~1.18x over background.</a:t>
+            </a:r>
+          </a:p>
+          <a:p>
+            <a:pPr/>
+            <a:r>
+              <a:t>Control Validation Issue</a:t>
+            </a:r>
+          </a:p>
+          <a:p>
+            <a:pPr/>
+            <a:r>
+              <a:t>The positive control (TIMP 3) also exhibited extremely low binding (1.17x fold change). This indicates a potential issue with target biotinylation/labeling or the secondary staining protocol, rather than an inherent failure of the novel binders. Assays should be repeated with fresh/validated target batches.</a:t>
+            </a:r>
+          </a:p>
+        </p:txBody>
+      </p:sp>
+    </p:spTree>
+  </p:cSld>
+  <p:clrMapOvr>
+    <a:masterClrMapping/>
+  </p:clrMapOvr>
+</p:sld>
+</file>
+
+<file path=ppt/slides/slide45.xml><?xml version="1.0" encoding="utf-8"?>
+<p:sld xmlns:a="http://schemas.openxmlformats.org/drawingml/2006/main" xmlns:p="http://schemas.openxmlformats.org/presentationml/2006/main" xmlns:r="http://schemas.openxmlformats.org/officeDocument/2006/relationships">
+  <p:cSld>
+    <p:spTree>
+      <p:nvGrpSpPr>
+        <p:cNvPr id="1" name=""/>
+        <p:cNvGrpSpPr/>
+        <p:nvPr/>
+      </p:nvGrpSpPr>
+      <p:grpSpPr/>
+      <p:sp>
+        <p:nvSpPr>
+          <p:cNvPr id="2" name="Title 1"/>
+          <p:cNvSpPr>
+            <a:spLocks noGrp="1"/>
+          </p:cNvSpPr>
+          <p:nvPr>
+            <p:ph type="title"/>
+          </p:nvPr>
+        </p:nvSpPr>
+        <p:spPr/>
+        <p:txBody>
+          <a:bodyPr/>
+          <a:lstStyle/>
+          <a:p/>
+        </p:txBody>
+      </p:sp>
+      <p:sp>
+        <p:nvSpPr>
+          <p:cNvPr id="3" name="Content Placeholder 2"/>
+          <p:cNvSpPr>
+            <a:spLocks noGrp="1"/>
+          </p:cNvSpPr>
+          <p:nvPr>
+            <p:ph idx="1"/>
+          </p:nvPr>
+        </p:nvSpPr>
+        <p:spPr/>
+        <p:txBody>
+          <a:bodyPr wrap="square"/>
+          <a:lstStyle/>
+          <a:p/>
+          <a:p>
+            <a:pPr/>
+            <a:r>
+              <a:t>layout: default</a:t>
+            </a:r>
+          </a:p>
+          <a:p>
+            <a:pPr/>
+            <a:r>
+              <a:t>transition: fade-out</a:t>
+            </a:r>
+          </a:p>
+        </p:txBody>
+      </p:sp>
+    </p:spTree>
+  </p:cSld>
+  <p:clrMapOvr>
+    <a:masterClrMapping/>
+  </p:clrMapOvr>
+</p:sld>
+</file>
+
+<file path=ppt/slides/slide46.xml><?xml version="1.0" encoding="utf-8"?>
+<p:sld xmlns:a="http://schemas.openxmlformats.org/drawingml/2006/main" xmlns:p="http://schemas.openxmlformats.org/presentationml/2006/main" xmlns:r="http://schemas.openxmlformats.org/officeDocument/2006/relationships">
+  <p:cSld>
+    <p:spTree>
+      <p:nvGrpSpPr>
+        <p:cNvPr id="1" name=""/>
+        <p:cNvGrpSpPr/>
+        <p:nvPr/>
+      </p:nvGrpSpPr>
+      <p:grpSpPr/>
+      <p:sp>
+        <p:nvSpPr>
+          <p:cNvPr id="2" name="Title 1"/>
+          <p:cNvSpPr>
+            <a:spLocks noGrp="1"/>
+          </p:cNvSpPr>
+          <p:nvPr>
+            <p:ph type="title"/>
+          </p:nvPr>
+        </p:nvSpPr>
+        <p:spPr/>
+        <p:txBody>
+          <a:bodyPr/>
+          <a:lstStyle/>
+          <a:p>
+            <a:r>
+              <a:t>Yeast Display Target Trial — ADAM10 &amp; MMP9 (June 10\textsuperscript{th}, 2026)</a:t>
+            </a:r>
+          </a:p>
+        </p:txBody>
+      </p:sp>
+      <p:sp>
+        <p:nvSpPr>
+          <p:cNvPr id="3" name="Content Placeholder 2"/>
+          <p:cNvSpPr>
+            <a:spLocks noGrp="1"/>
+          </p:cNvSpPr>
+          <p:nvPr>
+            <p:ph idx="1"/>
+          </p:nvPr>
+        </p:nvSpPr>
+        <p:spPr/>
+        <p:txBody>
+          <a:bodyPr wrap="square"/>
+          <a:lstStyle/>
+          <a:p/>
+          <a:p>
+            <a:pPr/>
+            <a:r>
+              <a:t>Flow Cytometry assessment of TwistBio constructs against commercial and in-house targets.</a:t>
+            </a:r>
+          </a:p>
+          <a:p>
+            <a:pPr/>
+            <a:r>
+              <a:t>ADAM10 Fraction 6 (Ryan's run _R, FITC-A Binding, APC-A Expression).</a:t>
+            </a:r>
+          </a:p>
+          <a:p>
+            <a:pPr/>
+            <a:r>
+              <a:t>MMP9 Positives Validated</a:t>
+            </a:r>
+          </a:p>
+          <a:p>
+            <a:pPr/>
+            <a:r>
+              <a:t>Sino MMP9 binding was strong: positive control TIMP3 achieved 38.2% Double+ (491 MFI), and Twist variants AB 7 and AB 3 achieved 33.5% and 32.9% Double+ respectively, validating the display system.</a:t>
+            </a:r>
+          </a:p>
+          <a:p>
+            <a:pPr/>
+            <a:r>
+              <a:t>ADAM10 Binding Confirmed</a:t>
+            </a:r>
+          </a:p>
+          <a:p>
+            <a:pPr/>
+            <a:r>
+              <a:t>Re-analysis with the correct channel configuration (FITC-A binding) revealed robust binding for ADAM10 F6 and F9. AB 7 achieved 13.29% Double+ (1.56x MFI vs TIMP 3 positive control), and AB 1 reached 11.71% Double+.</a:t>
+            </a:r>
+          </a:p>
+          <a:p>
+            <a:pPr/>
+            <a:r>
+              <a:t>Commercial AbCam Validation</a:t>
+            </a:r>
+          </a:p>
+          <a:p>
+            <a:pPr/>
+            <a:r>
+              <a:t>Commercial AbCam ADAM10 confirmed target activity: TIMP 3 positive control achieved 12.65% Double+, and Twist variants AB 5 and AB 3 showed strong binding (MFI 1708 and 1665.5).</a:t>
+            </a:r>
+          </a:p>
+        </p:txBody>
+      </p:sp>
+    </p:spTree>
+  </p:cSld>
+  <p:clrMapOvr>
+    <a:masterClrMapping/>
+  </p:clrMapOvr>
+</p:sld>
+</file>
+
+<file path=ppt/slides/slide47.xml><?xml version="1.0" encoding="utf-8"?>
+<p:sld xmlns:a="http://schemas.openxmlformats.org/drawingml/2006/main" xmlns:p="http://schemas.openxmlformats.org/presentationml/2006/main" xmlns:r="http://schemas.openxmlformats.org/officeDocument/2006/relationships">
+  <p:cSld>
+    <p:spTree>
+      <p:nvGrpSpPr>
+        <p:cNvPr id="1" name=""/>
+        <p:cNvGrpSpPr/>
+        <p:nvPr/>
+      </p:nvGrpSpPr>
+      <p:grpSpPr/>
+      <p:sp>
+        <p:nvSpPr>
+          <p:cNvPr id="2" name="Title 1"/>
+          <p:cNvSpPr>
+            <a:spLocks noGrp="1"/>
+          </p:cNvSpPr>
+          <p:nvPr>
+            <p:ph type="title"/>
+          </p:nvPr>
+        </p:nvSpPr>
+        <p:spPr/>
+        <p:txBody>
+          <a:bodyPr/>
+          <a:lstStyle/>
+          <a:p/>
+        </p:txBody>
+      </p:sp>
+      <p:sp>
+        <p:nvSpPr>
+          <p:cNvPr id="3" name="Content Placeholder 2"/>
+          <p:cNvSpPr>
+            <a:spLocks noGrp="1"/>
+          </p:cNvSpPr>
+          <p:nvPr>
+            <p:ph idx="1"/>
+          </p:nvPr>
+        </p:nvSpPr>
+        <p:spPr/>
+        <p:txBody>
+          <a:bodyPr wrap="square"/>
+          <a:lstStyle/>
+          <a:p/>
+          <a:p>
+            <a:pPr/>
+            <a:r>
+              <a:t>layout: default</a:t>
+            </a:r>
+          </a:p>
+          <a:p>
+            <a:pPr/>
+            <a:r>
+              <a:t>transition: fade-out</a:t>
+            </a:r>
+          </a:p>
+        </p:txBody>
+      </p:sp>
+    </p:spTree>
+  </p:cSld>
+  <p:clrMapOvr>
+    <a:masterClrMapping/>
+  </p:clrMapOvr>
+</p:sld>
+</file>
+
+<file path=ppt/slides/slide48.xml><?xml version="1.0" encoding="utf-8"?>
+<p:sld xmlns:a="http://schemas.openxmlformats.org/drawingml/2006/main" xmlns:p="http://schemas.openxmlformats.org/presentationml/2006/main" xmlns:r="http://schemas.openxmlformats.org/officeDocument/2006/relationships">
+  <p:cSld>
+    <p:spTree>
+      <p:nvGrpSpPr>
+        <p:cNvPr id="1" name=""/>
+        <p:cNvGrpSpPr/>
+        <p:nvPr/>
+      </p:nvGrpSpPr>
+      <p:grpSpPr/>
+      <p:sp>
+        <p:nvSpPr>
+          <p:cNvPr id="2" name="Title 1"/>
+          <p:cNvSpPr>
+            <a:spLocks noGrp="1"/>
+          </p:cNvSpPr>
+          <p:nvPr>
+            <p:ph type="title"/>
+          </p:nvPr>
+        </p:nvSpPr>
+        <p:spPr/>
+        <p:txBody>
+          <a:bodyPr/>
+          <a:lstStyle/>
+          <a:p>
+            <a:r>
+              <a:t>Target Trial Analysis &amp; Channel Correction</a:t>
+            </a:r>
+          </a:p>
+        </p:txBody>
+      </p:sp>
+      <p:sp>
+        <p:nvSpPr>
+          <p:cNvPr id="3" name="Content Placeholder 2"/>
+          <p:cNvSpPr>
+            <a:spLocks noGrp="1"/>
+          </p:cNvSpPr>
+          <p:nvPr>
+            <p:ph idx="1"/>
+          </p:nvPr>
+        </p:nvSpPr>
+        <p:spPr/>
+        <p:txBody>
+          <a:bodyPr wrap="square"/>
+          <a:lstStyle/>
+          <a:p/>
+          <a:p>
+            <a:pPr/>
+            <a:r>
+              <a:t>Resolving analysis channel mismatch and explaining detection reagent failures.</a:t>
+            </a:r>
+          </a:p>
+          <a:p>
+            <a:pPr/>
+            <a:r>
+              <a:t>Channel Mismatch Resolved</a:t>
+            </a:r>
+          </a:p>
+          <a:p>
+            <a:pPr/>
+            <a:r>
+              <a:t>The default pipeline assumed a PE-A binding channel (Gavin's protocol). Re-running the pipeline with the correct FITC-A channel configuration for Ryan's run (_R) corrected the false-negative results.</a:t>
+            </a:r>
+          </a:p>
+          <a:p>
+            <a:pPr/>
+            <a:r>
+              <a:t>Detection Reagent Troubleshooting</a:t>
+            </a:r>
+          </a:p>
+          <a:p>
+            <a:pPr/>
+            <a:r>
+              <a:t>PE-A Reagent Failure: Gavin's run (_G) used 555-conjugated anti-FLAG and showed low signal (&amp;lt;1% Double+) across all samples. This points to a failure in his PE detection reagents or sample preparation.</a:t>
+            </a:r>
+          </a:p>
+          <a:p>
+            <a:pPr/>
+            <a:r>
+              <a:t>FITC-A Validation: Using AF488 anti-mouse (FITC) for anti-FLAG binding and AF647 anti-rabbit (APC) for anti-c-myc expression confirmed high target activity.</a:t>
+            </a:r>
+          </a:p>
+          <a:p>
+            <a:pPr/>
+            <a:r>
+              <a:t>Spillover QC: Gating and spillover correction worked as expected (Alpha = 0.1638), eliminating false-positive bleed-through between channels.</a:t>
+            </a:r>
+          </a:p>
+          <a:p>
+            <a:pPr/>
+            <a:r>
+              <a:t>Active Target Conclusion</a:t>
+            </a:r>
+          </a:p>
+          <a:p>
+            <a:pPr/>
+            <a:r>
+              <a:t>Both in-house purified ADAM10 FPLC fractions (F6 and F9) are folded and active, showing clear target binding and making them suitable for sorting and selectivity validations.</a:t>
+            </a:r>
+          </a:p>
+        </p:txBody>
+      </p:sp>
+    </p:spTree>
+  </p:cSld>
+  <p:clrMapOvr>
+    <a:masterClrMapping/>
+  </p:clrMapOvr>
+</p:sld>
+</file>
+
+<file path=ppt/slides/slide49.xml><?xml version="1.0" encoding="utf-8"?>
+<p:sld xmlns:a="http://schemas.openxmlformats.org/drawingml/2006/main" xmlns:p="http://schemas.openxmlformats.org/presentationml/2006/main" xmlns:r="http://schemas.openxmlformats.org/officeDocument/2006/relationships">
+  <p:cSld>
+    <p:spTree>
+      <p:nvGrpSpPr>
+        <p:cNvPr id="1" name=""/>
+        <p:cNvGrpSpPr/>
+        <p:nvPr/>
+      </p:nvGrpSpPr>
+      <p:grpSpPr/>
+      <p:sp>
+        <p:nvSpPr>
+          <p:cNvPr id="2" name="Title 1"/>
+          <p:cNvSpPr>
+            <a:spLocks noGrp="1"/>
+          </p:cNvSpPr>
+          <p:nvPr>
+            <p:ph type="title"/>
+          </p:nvPr>
+        </p:nvSpPr>
+        <p:spPr/>
+        <p:txBody>
+          <a:bodyPr/>
+          <a:lstStyle/>
+          <a:p/>
+        </p:txBody>
+      </p:sp>
+      <p:sp>
+        <p:nvSpPr>
+          <p:cNvPr id="3" name="Content Placeholder 2"/>
+          <p:cNvSpPr>
+            <a:spLocks noGrp="1"/>
+          </p:cNvSpPr>
+          <p:nvPr>
+            <p:ph idx="1"/>
+          </p:nvPr>
+        </p:nvSpPr>
+        <p:spPr/>
+        <p:txBody>
+          <a:bodyPr wrap="square"/>
+          <a:lstStyle/>
+          <a:p/>
+          <a:p>
+            <a:pPr/>
+            <a:r>
+              <a:t>layout: section</a:t>
+            </a:r>
+          </a:p>
+          <a:p>
+            <a:pPr/>
+            <a:r>
+              <a:t>transition: slide-up</a:t>
             </a:r>
           </a:p>
         </p:txBody>
@@ -4666,13 +7279,1071 @@
           <a:p>
             <a:pPr/>
             <a:r>
-              <a:t>layout: section</a:t>
-            </a:r>
-          </a:p>
-          <a:p>
-            <a:pPr/>
-            <a:r>
-              <a:t>transition: slide-up</a:t>
+              <a:t>layout: default</a:t>
+            </a:r>
+          </a:p>
+          <a:p>
+            <a:pPr/>
+            <a:r>
+              <a:t>transition: fade-out</a:t>
+            </a:r>
+          </a:p>
+        </p:txBody>
+      </p:sp>
+    </p:spTree>
+  </p:cSld>
+  <p:clrMapOvr>
+    <a:masterClrMapping/>
+  </p:clrMapOvr>
+</p:sld>
+</file>
+
+<file path=ppt/slides/slide50.xml><?xml version="1.0" encoding="utf-8"?>
+<p:sld xmlns:a="http://schemas.openxmlformats.org/drawingml/2006/main" xmlns:p="http://schemas.openxmlformats.org/presentationml/2006/main" xmlns:r="http://schemas.openxmlformats.org/officeDocument/2006/relationships">
+  <p:cSld>
+    <p:spTree>
+      <p:nvGrpSpPr>
+        <p:cNvPr id="1" name=""/>
+        <p:cNvGrpSpPr/>
+        <p:nvPr/>
+      </p:nvGrpSpPr>
+      <p:grpSpPr/>
+      <p:sp>
+        <p:nvSpPr>
+          <p:cNvPr id="2" name="Title 1"/>
+          <p:cNvSpPr>
+            <a:spLocks noGrp="1"/>
+          </p:cNvSpPr>
+          <p:nvPr>
+            <p:ph type="title"/>
+          </p:nvPr>
+        </p:nvSpPr>
+        <p:spPr/>
+        <p:txBody>
+          <a:bodyPr/>
+          <a:lstStyle/>
+          <a:p>
+            <a:r>
+              <a:t>Appendix: ADAM10/17 Expression &amp; Purification</a:t>
+            </a:r>
+          </a:p>
+        </p:txBody>
+      </p:sp>
+      <p:sp>
+        <p:nvSpPr>
+          <p:cNvPr id="3" name="Content Placeholder 2"/>
+          <p:cNvSpPr>
+            <a:spLocks noGrp="1"/>
+          </p:cNvSpPr>
+          <p:nvPr>
+            <p:ph idx="1"/>
+          </p:nvPr>
+        </p:nvSpPr>
+        <p:spPr/>
+        <p:txBody>
+          <a:bodyPr wrap="square"/>
+          <a:lstStyle/>
+          <a:p/>
+          <a:p>
+            <a:pPr>
+              <a:defRPr b="1" sz="2400"/>
+            </a:pPr>
+            <a:r>
+              <a:t>FPLC and SDS-PAGE Optimization</a:t>
+            </a:r>
+          </a:p>
+        </p:txBody>
+      </p:sp>
+    </p:spTree>
+  </p:cSld>
+  <p:clrMapOvr>
+    <a:masterClrMapping/>
+  </p:clrMapOvr>
+</p:sld>
+</file>
+
+<file path=ppt/slides/slide51.xml><?xml version="1.0" encoding="utf-8"?>
+<p:sld xmlns:a="http://schemas.openxmlformats.org/drawingml/2006/main" xmlns:p="http://schemas.openxmlformats.org/presentationml/2006/main" xmlns:r="http://schemas.openxmlformats.org/officeDocument/2006/relationships">
+  <p:cSld>
+    <p:spTree>
+      <p:nvGrpSpPr>
+        <p:cNvPr id="1" name=""/>
+        <p:cNvGrpSpPr/>
+        <p:nvPr/>
+      </p:nvGrpSpPr>
+      <p:grpSpPr/>
+      <p:sp>
+        <p:nvSpPr>
+          <p:cNvPr id="2" name="Title 1"/>
+          <p:cNvSpPr>
+            <a:spLocks noGrp="1"/>
+          </p:cNvSpPr>
+          <p:nvPr>
+            <p:ph type="title"/>
+          </p:nvPr>
+        </p:nvSpPr>
+        <p:spPr/>
+        <p:txBody>
+          <a:bodyPr/>
+          <a:lstStyle/>
+          <a:p/>
+        </p:txBody>
+      </p:sp>
+      <p:sp>
+        <p:nvSpPr>
+          <p:cNvPr id="3" name="Content Placeholder 2"/>
+          <p:cNvSpPr>
+            <a:spLocks noGrp="1"/>
+          </p:cNvSpPr>
+          <p:nvPr>
+            <p:ph idx="1"/>
+          </p:nvPr>
+        </p:nvSpPr>
+        <p:spPr/>
+        <p:txBody>
+          <a:bodyPr wrap="square"/>
+          <a:lstStyle/>
+          <a:p/>
+          <a:p>
+            <a:pPr/>
+            <a:r>
+              <a:t>layout: default</a:t>
+            </a:r>
+          </a:p>
+          <a:p>
+            <a:pPr/>
+            <a:r>
+              <a:t>transition: fade-out</a:t>
+            </a:r>
+          </a:p>
+        </p:txBody>
+      </p:sp>
+    </p:spTree>
+  </p:cSld>
+  <p:clrMapOvr>
+    <a:masterClrMapping/>
+  </p:clrMapOvr>
+</p:sld>
+</file>
+
+<file path=ppt/slides/slide52.xml><?xml version="1.0" encoding="utf-8"?>
+<p:sld xmlns:a="http://schemas.openxmlformats.org/drawingml/2006/main" xmlns:p="http://schemas.openxmlformats.org/presentationml/2006/main" xmlns:r="http://schemas.openxmlformats.org/officeDocument/2006/relationships">
+  <p:cSld>
+    <p:spTree>
+      <p:nvGrpSpPr>
+        <p:cNvPr id="1" name=""/>
+        <p:cNvGrpSpPr/>
+        <p:nvPr/>
+      </p:nvGrpSpPr>
+      <p:grpSpPr/>
+      <p:sp>
+        <p:nvSpPr>
+          <p:cNvPr id="2" name="Title 1"/>
+          <p:cNvSpPr>
+            <a:spLocks noGrp="1"/>
+          </p:cNvSpPr>
+          <p:nvPr>
+            <p:ph type="title"/>
+          </p:nvPr>
+        </p:nvSpPr>
+        <p:spPr/>
+        <p:txBody>
+          <a:bodyPr/>
+          <a:lstStyle/>
+          <a:p>
+            <a:r>
+              <a:t>FPLC Purification — ADAM10 &amp; 17</a:t>
+            </a:r>
+          </a:p>
+        </p:txBody>
+      </p:sp>
+      <p:sp>
+        <p:nvSpPr>
+          <p:cNvPr id="3" name="Content Placeholder 2"/>
+          <p:cNvSpPr>
+            <a:spLocks noGrp="1"/>
+          </p:cNvSpPr>
+          <p:nvPr>
+            <p:ph idx="1"/>
+          </p:nvPr>
+        </p:nvSpPr>
+        <p:spPr/>
+        <p:txBody>
+          <a:bodyPr wrap="square"/>
+          <a:lstStyle/>
+          <a:p/>
+          <a:p>
+            <a:pPr/>
+            <a:r>
+              <a:t>Optimization of Anion Exchange Chromatography (HiTrap Q FF).</a:t>
+            </a:r>
+          </a:p>
+          <a:p>
+            <a:pPr/>
+            <a:r>
+              <a:t>ADAM10 (Sam's sample)</a:t>
+            </a:r>
+          </a:p>
+          <a:p>
+            <a:pPr/>
+            <a:r>
+              <a:t>Run on AEC SAMPLE HiTrap Q FF preset. Only UV peak is in sample application.</a:t>
+            </a:r>
+          </a:p>
+          <a:p>
+            <a:pPr/>
+            <a:r>
+              <a:t>ADAM10-pMopac</a:t>
+            </a:r>
+          </a:p>
+          <a:p>
+            <a:pPr/>
+            <a:r>
+              <a:t>Diluted 1:4 with Buffer A. Something is eluting during wash. May need a more aggressive NaCl concentration during wash.</a:t>
+            </a:r>
+          </a:p>
+        </p:txBody>
+      </p:sp>
+    </p:spTree>
+  </p:cSld>
+  <p:clrMapOvr>
+    <a:masterClrMapping/>
+  </p:clrMapOvr>
+</p:sld>
+</file>
+
+<file path=ppt/slides/slide53.xml><?xml version="1.0" encoding="utf-8"?>
+<p:sld xmlns:a="http://schemas.openxmlformats.org/drawingml/2006/main" xmlns:p="http://schemas.openxmlformats.org/presentationml/2006/main" xmlns:r="http://schemas.openxmlformats.org/officeDocument/2006/relationships">
+  <p:cSld>
+    <p:spTree>
+      <p:nvGrpSpPr>
+        <p:cNvPr id="1" name=""/>
+        <p:cNvGrpSpPr/>
+        <p:nvPr/>
+      </p:nvGrpSpPr>
+      <p:grpSpPr/>
+      <p:sp>
+        <p:nvSpPr>
+          <p:cNvPr id="2" name="Title 1"/>
+          <p:cNvSpPr>
+            <a:spLocks noGrp="1"/>
+          </p:cNvSpPr>
+          <p:nvPr>
+            <p:ph type="title"/>
+          </p:nvPr>
+        </p:nvSpPr>
+        <p:spPr/>
+        <p:txBody>
+          <a:bodyPr/>
+          <a:lstStyle/>
+          <a:p>
+            <a:r>
+              <a:t>SDS-PAGE &amp; Silver Stain Validation (June 2\textsuperscript{nd}, 2026)</a:t>
+            </a:r>
+          </a:p>
+        </p:txBody>
+      </p:sp>
+      <p:sp>
+        <p:nvSpPr>
+          <p:cNvPr id="3" name="Content Placeholder 2"/>
+          <p:cNvSpPr>
+            <a:spLocks noGrp="1"/>
+          </p:cNvSpPr>
+          <p:nvPr>
+            <p:ph idx="1"/>
+          </p:nvPr>
+        </p:nvSpPr>
+        <p:spPr/>
+        <p:txBody>
+          <a:bodyPr wrap="square"/>
+          <a:lstStyle/>
+          <a:p/>
+          <a:p>
+            <a:pPr/>
+            <a:r>
+              <a:t>Successful detection and optimization of ADAM10 expression and FPLC fractions.</a:t>
+            </a:r>
+          </a:p>
+          <a:p>
+            <a:pPr/>
+            <a:r>
+              <a:t>ADAM10 Expression (Coomassie)</a:t>
+            </a:r>
+          </a:p>
+          <a:p>
+            <a:pPr/>
+            <a:r>
+              <a:t>Expression test part 2. Bands visible at ~60-70 kDa corresponding to catalytic domain.</a:t>
+            </a:r>
+          </a:p>
+          <a:p>
+            <a:pPr/>
+            <a:r>
+              <a:t>Comparison with Jake's samples provides an independent expression benchmark.</a:t>
+            </a:r>
+          </a:p>
+          <a:p>
+            <a:pPr/>
+            <a:r>
+              <a:t>Low-Abundance (Silver Stain)</a:t>
+            </a:r>
+          </a:p>
+          <a:p>
+            <a:pPr/>
+            <a:r>
+              <a:t>Pierce Silver Stain of FPLC fractions. Confirmed presence in low-concentration samples.</a:t>
+            </a:r>
+          </a:p>
+          <a:p>
+            <a:pPr/>
+            <a:r>
+              <a:t>Detects F6 leakage in filtrate. Ladder compromised, so band identity is approximate.</a:t>
+            </a:r>
+          </a:p>
+        </p:txBody>
+      </p:sp>
+    </p:spTree>
+  </p:cSld>
+  <p:clrMapOvr>
+    <a:masterClrMapping/>
+  </p:clrMapOvr>
+</p:sld>
+</file>
+
+<file path=ppt/slides/slide54.xml><?xml version="1.0" encoding="utf-8"?>
+<p:sld xmlns:a="http://schemas.openxmlformats.org/drawingml/2006/main" xmlns:p="http://schemas.openxmlformats.org/presentationml/2006/main" xmlns:r="http://schemas.openxmlformats.org/officeDocument/2006/relationships">
+  <p:cSld>
+    <p:spTree>
+      <p:nvGrpSpPr>
+        <p:cNvPr id="1" name=""/>
+        <p:cNvGrpSpPr/>
+        <p:nvPr/>
+      </p:nvGrpSpPr>
+      <p:grpSpPr/>
+      <p:sp>
+        <p:nvSpPr>
+          <p:cNvPr id="2" name="Title 1"/>
+          <p:cNvSpPr>
+            <a:spLocks noGrp="1"/>
+          </p:cNvSpPr>
+          <p:nvPr>
+            <p:ph type="title"/>
+          </p:nvPr>
+        </p:nvSpPr>
+        <p:spPr/>
+        <p:txBody>
+          <a:bodyPr/>
+          <a:lstStyle/>
+          <a:p>
+            <a:r>
+              <a:t>Protein Concentration &amp; Recovery (June 2\textsuperscript{nd}, 2026)</a:t>
+            </a:r>
+          </a:p>
+        </p:txBody>
+      </p:sp>
+      <p:sp>
+        <p:nvSpPr>
+          <p:cNvPr id="3" name="Content Placeholder 2"/>
+          <p:cNvSpPr>
+            <a:spLocks noGrp="1"/>
+          </p:cNvSpPr>
+          <p:nvPr>
+            <p:ph idx="1"/>
+          </p:nvPr>
+        </p:nvSpPr>
+        <p:spPr/>
+        <p:txBody>
+          <a:bodyPr wrap="square"/>
+          <a:lstStyle/>
+          <a:p/>
+          <a:p>
+            <a:pPr/>
+            <a:r>
+              <a:t>Evaluation of FPLC fractions following spin concentration with Amicon Ultra-4 (10 kDa MWCO).</a:t>
+            </a:r>
+          </a:p>
+          <a:p>
+            <a:pPr/>
+            <a:r>
+              <a:t>NanoDrop A280 Protein Concentrations</a:t>
+            </a:r>
+          </a:p>
+          <a:p>
+            <a:pPr/>
+            <a:r>
+              <a:t>Sample Name</a:t>
+            </a:r>
+          </a:p>
+          <a:p>
+            <a:pPr/>
+            <a:r>
+              <a:t>Protein (mg/mL)</a:t>
+            </a:r>
+          </a:p>
+          <a:p>
+            <a:pPr/>
+            <a:r>
+              <a:t>A280</a:t>
+            </a:r>
+          </a:p>
+          <a:p>
+            <a:pPr/>
+            <a:r>
+              <a:t>A260/A280</a:t>
+            </a:r>
+          </a:p>
+          <a:p>
+            <a:pPr/>
+            <a:r>
+              <a:t>A10 FXN 6 Unconcentrated</a:t>
+            </a:r>
+          </a:p>
+          <a:p>
+            <a:pPr/>
+            <a:r>
+              <a:t>0.163</a:t>
+            </a:r>
+          </a:p>
+          <a:p>
+            <a:pPr/>
+            <a:r>
+              <a:t>0.163</a:t>
+            </a:r>
+          </a:p>
+          <a:p>
+            <a:pPr/>
+            <a:r>
+              <a:t>0.963</a:t>
+            </a:r>
+          </a:p>
+          <a:p>
+            <a:pPr/>
+            <a:r>
+              <a:t>A10 FXN 6 Filtrate (Leakage)</a:t>
+            </a:r>
+          </a:p>
+          <a:p>
+            <a:pPr/>
+            <a:r>
+              <a:t>0.176</a:t>
+            </a:r>
+          </a:p>
+          <a:p>
+            <a:pPr/>
+            <a:r>
+              <a:t>0.176</a:t>
+            </a:r>
+          </a:p>
+          <a:p>
+            <a:pPr/>
+            <a:r>
+              <a:t>0.981</a:t>
+            </a:r>
+          </a:p>
+          <a:p>
+            <a:pPr/>
+            <a:r>
+              <a:t>A10 FXN 6 Residue (3.2x)</a:t>
+            </a:r>
+          </a:p>
+          <a:p>
+            <a:pPr/>
+            <a:r>
+              <a:t>0.519</a:t>
+            </a:r>
+          </a:p>
+          <a:p>
+            <a:pPr/>
+            <a:r>
+              <a:t>0.519</a:t>
+            </a:r>
+          </a:p>
+          <a:p>
+            <a:pPr/>
+            <a:r>
+              <a:t>0.779</a:t>
+            </a:r>
+          </a:p>
+          <a:p>
+            <a:pPr/>
+            <a:r>
+              <a:t>A10 FXN 9 Unconcentrated</a:t>
+            </a:r>
+          </a:p>
+          <a:p>
+            <a:pPr/>
+            <a:r>
+              <a:t>0.141</a:t>
+            </a:r>
+          </a:p>
+          <a:p>
+            <a:pPr/>
+            <a:r>
+              <a:t>0.141</a:t>
+            </a:r>
+          </a:p>
+          <a:p>
+            <a:pPr/>
+            <a:r>
+              <a:t>1.309</a:t>
+            </a:r>
+          </a:p>
+          <a:p>
+            <a:pPr/>
+            <a:r>
+              <a:t>A10 FXN 9 Filtrate</a:t>
+            </a:r>
+          </a:p>
+          <a:p>
+            <a:pPr/>
+            <a:r>
+              <a:t>0.063</a:t>
+            </a:r>
+          </a:p>
+          <a:p>
+            <a:pPr/>
+            <a:r>
+              <a:t>0.063</a:t>
+            </a:r>
+          </a:p>
+          <a:p>
+            <a:pPr/>
+            <a:r>
+              <a:t>1.358</a:t>
+            </a:r>
+          </a:p>
+          <a:p>
+            <a:pPr/>
+            <a:r>
+              <a:t>A10 FXN 9 Residue (6.1x)</a:t>
+            </a:r>
+          </a:p>
+          <a:p>
+            <a:pPr/>
+            <a:r>
+              <a:t>0.863</a:t>
+            </a:r>
+          </a:p>
+          <a:p>
+            <a:pPr/>
+            <a:r>
+              <a:t>0.863</a:t>
+            </a:r>
+          </a:p>
+          <a:p>
+            <a:pPr/>
+            <a:r>
+              <a:t>0.803</a:t>
+            </a:r>
+          </a:p>
+          <a:p>
+            <a:pPr/>
+            <a:r>
+              <a:t>ADAM 17 FXN 12</a:t>
+            </a:r>
+          </a:p>
+          <a:p>
+            <a:pPr/>
+            <a:r>
+              <a:t>0.141</a:t>
+            </a:r>
+          </a:p>
+          <a:p>
+            <a:pPr/>
+            <a:r>
+              <a:t>0.141</a:t>
+            </a:r>
+          </a:p>
+          <a:p>
+            <a:pPr/>
+            <a:r>
+              <a:t>0.930</a:t>
+            </a:r>
+          </a:p>
+          <a:p>
+            <a:pPr/>
+            <a:r>
+              <a:t>Key Accomplishments</a:t>
+            </a:r>
+          </a:p>
+          <a:p>
+            <a:pPr/>
+            <a:r>
+              <a:t>Successful Concentration: Spin concentration is highly effective for concentrating FPLC fractions. ADAM10 FXN 9 yielded a 6.1x increase in concentration (up to 0.863 mg/mL) with minimal loss in filtrate (0.063 mg/mL).</a:t>
+            </a:r>
+          </a:p>
+          <a:p>
+            <a:pPr/>
+            <a:r>
+              <a:t>Leakage Alert</a:t>
+            </a:r>
+          </a:p>
+          <a:p>
+            <a:pPr/>
+            <a:r>
+              <a:t>ADAM10 FXN 6 Membrane Failure: A10 FXN 6 showed significant protein leakage in the filtrate (0.176 mg/mL vs 0.163 mg/mL unconcentrated), indicating a membrane seal failure in that specific centrifugal unit.</a:t>
+            </a:r>
+          </a:p>
+          <a:p>
+            <a:pPr/>
+            <a:r>
+              <a:t>Future Recommendations</a:t>
+            </a:r>
+          </a:p>
+          <a:p>
+            <a:pPr/>
+            <a:r>
+              <a:t>Check membrane integrity before run. Check yields of ADAM17 FXN 12 which remains low (0.141 mg/mL) and may require additional optimization.</a:t>
+            </a:r>
+          </a:p>
+        </p:txBody>
+      </p:sp>
+    </p:spTree>
+  </p:cSld>
+  <p:clrMapOvr>
+    <a:masterClrMapping/>
+  </p:clrMapOvr>
+</p:sld>
+</file>
+
+<file path=ppt/slides/slide55.xml><?xml version="1.0" encoding="utf-8"?>
+<p:sld xmlns:a="http://schemas.openxmlformats.org/drawingml/2006/main" xmlns:p="http://schemas.openxmlformats.org/presentationml/2006/main" xmlns:r="http://schemas.openxmlformats.org/officeDocument/2006/relationships">
+  <p:cSld>
+    <p:spTree>
+      <p:nvGrpSpPr>
+        <p:cNvPr id="1" name=""/>
+        <p:cNvGrpSpPr/>
+        <p:nvPr/>
+      </p:nvGrpSpPr>
+      <p:grpSpPr/>
+      <p:sp>
+        <p:nvSpPr>
+          <p:cNvPr id="2" name="Title 1"/>
+          <p:cNvSpPr>
+            <a:spLocks noGrp="1"/>
+          </p:cNvSpPr>
+          <p:nvPr>
+            <p:ph type="title"/>
+          </p:nvPr>
+        </p:nvSpPr>
+        <p:spPr/>
+        <p:txBody>
+          <a:bodyPr/>
+          <a:lstStyle/>
+          <a:p>
+            <a:r>
+              <a:t>ADAM17 Temperature Expansion Trial (June 3\textsuperscript{rd}, 2026)</a:t>
+            </a:r>
+          </a:p>
+        </p:txBody>
+      </p:sp>
+      <p:sp>
+        <p:nvSpPr>
+          <p:cNvPr id="3" name="Content Placeholder 2"/>
+          <p:cNvSpPr>
+            <a:spLocks noGrp="1"/>
+          </p:cNvSpPr>
+          <p:nvPr>
+            <p:ph idx="1"/>
+          </p:nvPr>
+        </p:nvSpPr>
+        <p:spPr/>
+        <p:txBody>
+          <a:bodyPr wrap="square"/>
+          <a:lstStyle/>
+          <a:p/>
+          <a:p>
+            <a:pPr/>
+            <a:r>
+              <a:t>Coomassie Blue SDS-PAGE of expression across induction temperatures and timepoints.</a:t>
+            </a:r>
+          </a:p>
+          <a:p>
+            <a:pPr/>
+            <a:r>
+              <a:t>Coomassie Blue stained 12% Tris-glycine gel of ADAM17 expression (15 lanes).</a:t>
+            </a:r>
+          </a:p>
+          <a:p>
+            <a:pPr/>
+            <a:r>
+              <a:t>Overnight Expression Requirement</a:t>
+            </a:r>
+          </a:p>
+          <a:p>
+            <a:pPr/>
+            <a:r>
+              <a:t>Strong Overnight Expression: The overnight lysate pellet (Lane 13) shows strong expression with a prominent band at $\approx$30 kDa, indicating that overnight expression is required to obtain detectable levels.</a:t>
+            </a:r>
+          </a:p>
+          <a:p>
+            <a:pPr/>
+            <a:r>
+              <a:t>Localization &amp; Leakage QC</a:t>
+            </a:r>
+          </a:p>
+          <a:p>
+            <a:pPr/>
+            <a:r>
+              <a:t>No Periplasmic Leakage: Target protein is absent in the growth supernatants (Lanes 7, 8, 9). The overnight growth pellet (Lane 12) shows expression, while early growth pellets (Lanes 10, 11) show none.</a:t>
+            </a:r>
+          </a:p>
+          <a:p>
+            <a:pPr/>
+            <a:r>
+              <a:t>Temperature Optimization</a:t>
+            </a:r>
+          </a:p>
+          <a:p>
+            <a:pPr/>
+            <a:r>
+              <a:t>25°C Standardization: Early induction points (Lanes 14 and 15) show no bands. 25°C overnight induction is recommended to minimize inclusion body formation in the cell pellet, aligning with ADAM10 observations.</a:t>
+            </a:r>
+          </a:p>
+        </p:txBody>
+      </p:sp>
+    </p:spTree>
+  </p:cSld>
+  <p:clrMapOvr>
+    <a:masterClrMapping/>
+  </p:clrMapOvr>
+</p:sld>
+</file>
+
+<file path=ppt/slides/slide56.xml><?xml version="1.0" encoding="utf-8"?>
+<p:sld xmlns:a="http://schemas.openxmlformats.org/drawingml/2006/main" xmlns:p="http://schemas.openxmlformats.org/presentationml/2006/main" xmlns:r="http://schemas.openxmlformats.org/officeDocument/2006/relationships">
+  <p:cSld>
+    <p:spTree>
+      <p:nvGrpSpPr>
+        <p:cNvPr id="1" name=""/>
+        <p:cNvGrpSpPr/>
+        <p:nvPr/>
+      </p:nvGrpSpPr>
+      <p:grpSpPr/>
+      <p:sp>
+        <p:nvSpPr>
+          <p:cNvPr id="2" name="Title 1"/>
+          <p:cNvSpPr>
+            <a:spLocks noGrp="1"/>
+          </p:cNvSpPr>
+          <p:nvPr>
+            <p:ph type="title"/>
+          </p:nvPr>
+        </p:nvSpPr>
+        <p:spPr/>
+        <p:txBody>
+          <a:bodyPr/>
+          <a:lstStyle/>
+          <a:p>
+            <a:r>
+              <a:t>SDS-PAGE &amp; Silver Stain Rerun (June 10\textsuperscript{th}, 2026)</a:t>
+            </a:r>
+          </a:p>
+        </p:txBody>
+      </p:sp>
+      <p:sp>
+        <p:nvSpPr>
+          <p:cNvPr id="3" name="Content Placeholder 2"/>
+          <p:cNvSpPr>
+            <a:spLocks noGrp="1"/>
+          </p:cNvSpPr>
+          <p:nvPr>
+            <p:ph idx="1"/>
+          </p:nvPr>
+        </p:nvSpPr>
+        <p:spPr/>
+        <p:txBody>
+          <a:bodyPr wrap="square"/>
+          <a:lstStyle/>
+          <a:p/>
+          <a:p>
+            <a:pPr/>
+            <a:r>
+              <a:t>Resolving migration issues with updated running gel chemistry and fresh buffers.</a:t>
+            </a:r>
+          </a:p>
+          <a:p>
+            <a:pPr/>
+            <a:r>
+              <a:t>ADAM10 Gel Rerun</a:t>
+            </a:r>
+          </a:p>
+          <a:p>
+            <a:pPr/>
+            <a:r>
+              <a:t>Successful resolution of FPLC Fraction 9 Retentate (Lane 14) showing a band in the 30-40 kDa range (expected catalytic domain size).</a:t>
+            </a:r>
+          </a:p>
+          <a:p>
+            <a:pPr/>
+            <a:r>
+              <a:t>ADAM17 Gel Rerun</a:t>
+            </a:r>
+          </a:p>
+          <a:p>
+            <a:pPr/>
+            <a:r>
+              <a:t>Successful resolution of FPLC Fraction 6 Retentate (Lane 14) resolving candidate target bands at 30-40 kDa with clean migration.</a:t>
+            </a:r>
+          </a:p>
+        </p:txBody>
+      </p:sp>
+    </p:spTree>
+  </p:cSld>
+  <p:clrMapOvr>
+    <a:masterClrMapping/>
+  </p:clrMapOvr>
+</p:sld>
+</file>
+
+<file path=ppt/slides/slide57.xml><?xml version="1.0" encoding="utf-8"?>
+<p:sld xmlns:a="http://schemas.openxmlformats.org/drawingml/2006/main" xmlns:p="http://schemas.openxmlformats.org/presentationml/2006/main" xmlns:r="http://schemas.openxmlformats.org/officeDocument/2006/relationships">
+  <p:cSld>
+    <p:spTree>
+      <p:nvGrpSpPr>
+        <p:cNvPr id="1" name=""/>
+        <p:cNvGrpSpPr/>
+        <p:nvPr/>
+      </p:nvGrpSpPr>
+      <p:grpSpPr/>
+      <p:sp>
+        <p:nvSpPr>
+          <p:cNvPr id="2" name="Title 1"/>
+          <p:cNvSpPr>
+            <a:spLocks noGrp="1"/>
+          </p:cNvSpPr>
+          <p:nvPr>
+            <p:ph type="title"/>
+          </p:nvPr>
+        </p:nvSpPr>
+        <p:spPr/>
+        <p:txBody>
+          <a:bodyPr/>
+          <a:lstStyle/>
+          <a:p>
+            <a:r>
+              <a:t>Western Blot &amp; Spin Concentration (June 11\textsuperscript{th}-12\textsuperscript{th}, 2026)</a:t>
+            </a:r>
+          </a:p>
+        </p:txBody>
+      </p:sp>
+      <p:sp>
+        <p:nvSpPr>
+          <p:cNvPr id="3" name="Content Placeholder 2"/>
+          <p:cNvSpPr>
+            <a:spLocks noGrp="1"/>
+          </p:cNvSpPr>
+          <p:nvPr>
+            <p:ph idx="1"/>
+          </p:nvPr>
+        </p:nvSpPr>
+        <p:spPr/>
+        <p:txBody>
+          <a:bodyPr wrap="square"/>
+          <a:lstStyle/>
+          <a:p/>
+          <a:p>
+            <a:pPr/>
+            <a:r>
+              <a:t>Validating expression, secretion, and concentration of ADAM10/17-pMopac target preparations.</a:t>
+            </a:r>
+          </a:p>
+          <a:p>
+            <a:pPr/>
+            <a:r>
+              <a:t>Centrifugal Spin Concentration</a:t>
+            </a:r>
+          </a:p>
+          <a:p>
+            <a:pPr/>
+            <a:r>
+              <a:t>20-40x Concentration: Culture supernatants from expression trials (25°C, 30°C, and overnight) were concentrated using Amicon Ultra-4 (10 kDa MWCO) with no membrane failures or seal leakage.</a:t>
+            </a:r>
+          </a:p>
+          <a:p>
+            <a:pPr/>
+            <a:r>
+              <a:t>Western Blot Protocol QC</a:t>
+            </a:r>
+          </a:p>
+          <a:p>
+            <a:pPr/>
+            <a:r>
+              <a:t>Trans-Blot Turbo: Blotted onto PVDF membrane using a custom 1.3A 24V 10Min protocol. Blocked in 5% milk / TBST-Brij, then incubated with mouse anti-FLAG (1:1000) primary antibody.</a:t>
+            </a:r>
+          </a:p>
+          <a:p>
+            <a:pPr/>
+            <a:r>
+              <a:t>Western Blot Parameters</a:t>
+            </a:r>
+          </a:p>
+          <a:p>
+            <a:pPr/>
+            <a:r>
+              <a:t>Lanes Loaded: Ladder, A10 lysis pellet, A10 25°C/30°C/ON supernatants, A10 FXN 6, A17 25°C/30°C/ON supernatants, MMP2-FLAG (positive control).</a:t>
+            </a:r>
+          </a:p>
+          <a:p>
+            <a:pPr/>
+            <a:r>
+              <a:t>Blocking/Wash: Blocked in 5% milk / TBST-Brij, primary anti-FLAG incubation overnight, secondary HRP-conjugated anti-mouse.</a:t>
+            </a:r>
+          </a:p>
+          <a:p>
+            <a:pPr/>
+            <a:r>
+              <a:t>Imaging: Chemiluminescent ECL imaging and Ponceau S membrane total protein transfer staining completed on June 12th.</a:t>
+            </a:r>
+          </a:p>
+        </p:txBody>
+      </p:sp>
+    </p:spTree>
+  </p:cSld>
+  <p:clrMapOvr>
+    <a:masterClrMapping/>
+  </p:clrMapOvr>
+</p:sld>
+</file>
+
+<file path=ppt/slides/slide58.xml><?xml version="1.0" encoding="utf-8"?>
+<p:sld xmlns:a="http://schemas.openxmlformats.org/drawingml/2006/main" xmlns:p="http://schemas.openxmlformats.org/presentationml/2006/main" xmlns:r="http://schemas.openxmlformats.org/officeDocument/2006/relationships">
+  <p:cSld>
+    <p:spTree>
+      <p:nvGrpSpPr>
+        <p:cNvPr id="1" name=""/>
+        <p:cNvGrpSpPr/>
+        <p:nvPr/>
+      </p:nvGrpSpPr>
+      <p:grpSpPr/>
+      <p:sp>
+        <p:nvSpPr>
+          <p:cNvPr id="2" name="Title 1"/>
+          <p:cNvSpPr>
+            <a:spLocks noGrp="1"/>
+          </p:cNvSpPr>
+          <p:nvPr>
+            <p:ph type="title"/>
+          </p:nvPr>
+        </p:nvSpPr>
+        <p:spPr/>
+        <p:txBody>
+          <a:bodyPr/>
+          <a:lstStyle/>
+          <a:p/>
+        </p:txBody>
+      </p:sp>
+      <p:sp>
+        <p:nvSpPr>
+          <p:cNvPr id="3" name="Content Placeholder 2"/>
+          <p:cNvSpPr>
+            <a:spLocks noGrp="1"/>
+          </p:cNvSpPr>
+          <p:nvPr>
+            <p:ph idx="1"/>
+          </p:nvPr>
+        </p:nvSpPr>
+        <p:spPr/>
+        <p:txBody>
+          <a:bodyPr wrap="square"/>
+          <a:lstStyle/>
+          <a:p/>
+          <a:p>
+            <a:pPr/>
+            <a:r>
+              <a:t>layout: default</a:t>
+            </a:r>
+          </a:p>
+          <a:p>
+            <a:pPr/>
+            <a:r>
+              <a:t>transition: fade-out</a:t>
+            </a:r>
+          </a:p>
+        </p:txBody>
+      </p:sp>
+    </p:spTree>
+  </p:cSld>
+  <p:clrMapOvr>
+    <a:masterClrMapping/>
+  </p:clrMapOvr>
+</p:sld>
+</file>
+
+<file path=ppt/slides/slide59.xml><?xml version="1.0" encoding="utf-8"?>
+<p:sld xmlns:a="http://schemas.openxmlformats.org/drawingml/2006/main" xmlns:p="http://schemas.openxmlformats.org/presentationml/2006/main" xmlns:r="http://schemas.openxmlformats.org/officeDocument/2006/relationships">
+  <p:cSld>
+    <p:spTree>
+      <p:nvGrpSpPr>
+        <p:cNvPr id="1" name=""/>
+        <p:cNvGrpSpPr/>
+        <p:nvPr/>
+      </p:nvGrpSpPr>
+      <p:grpSpPr/>
+      <p:sp>
+        <p:nvSpPr>
+          <p:cNvPr id="2" name="Title 1"/>
+          <p:cNvSpPr>
+            <a:spLocks noGrp="1"/>
+          </p:cNvSpPr>
+          <p:nvPr>
+            <p:ph type="title"/>
+          </p:nvPr>
+        </p:nvSpPr>
+        <p:spPr/>
+        <p:txBody>
+          <a:bodyPr/>
+          <a:lstStyle/>
+          <a:p>
+            <a:r>
+              <a:t>Western Blot Results &amp; Analysis (June 12\textsuperscript{th}, 2026)</a:t>
+            </a:r>
+          </a:p>
+        </p:txBody>
+      </p:sp>
+      <p:sp>
+        <p:nvSpPr>
+          <p:cNvPr id="3" name="Content Placeholder 2"/>
+          <p:cNvSpPr>
+            <a:spLocks noGrp="1"/>
+          </p:cNvSpPr>
+          <p:nvPr>
+            <p:ph idx="1"/>
+          </p:nvPr>
+        </p:nvSpPr>
+        <p:spPr/>
+        <p:txBody>
+          <a:bodyPr wrap="square"/>
+          <a:lstStyle/>
+          <a:p/>
+          <a:p>
+            <a:pPr/>
+            <a:r>
+              <a:t>Validating soluble target expression and membrane transfer quality.</a:t>
+            </a:r>
+          </a:p>
+          <a:p>
+            <a:pPr/>
+            <a:r>
+              <a:t>Ponceau S Membrane Stain</a:t>
+            </a:r>
+          </a:p>
+          <a:p>
+            <a:pPr/>
+            <a:r>
+              <a:t>Uniform total protein transfer showing high-fidelity transfer of ladder and major bands (20260612).</a:t>
+            </a:r>
+          </a:p>
+          <a:p>
+            <a:pPr/>
+            <a:r>
+              <a:t>Western Blot (Anti-FLAG)</a:t>
+            </a:r>
+          </a:p>
+          <a:p>
+            <a:pPr/>
+            <a:r>
+              <a:t>Lane 3 (ADAM10 25°C supernatant) shows a single soluble band near 60 kDa; lanes 7-9 (ADAM17) show no signal.</a:t>
             </a:r>
           </a:p>
         </p:txBody>
@@ -4711,7 +8382,325 @@
           <a:lstStyle/>
           <a:p>
             <a:r>
-              <a:t>Phase 1</a:t>
+              <a:t>TIMP3 Scaffold — Engineerable Loop Architecture</a:t>
+            </a:r>
+          </a:p>
+        </p:txBody>
+      </p:sp>
+      <p:sp>
+        <p:nvSpPr>
+          <p:cNvPr id="3" name="Content Placeholder 2"/>
+          <p:cNvSpPr>
+            <a:spLocks noGrp="1"/>
+          </p:cNvSpPr>
+          <p:nvPr>
+            <p:ph idx="1"/>
+          </p:nvPr>
+        </p:nvSpPr>
+        <p:spPr/>
+        <p:txBody>
+          <a:bodyPr wrap="square"/>
+          <a:lstStyle/>
+          <a:p/>
+          <a:p>
+            <a:pPr/>
+            <a:r>
+              <a:t>Hover over each loop to see its position, native length, and expansion range.</a:t>
+            </a:r>
+          </a:p>
+          <a:p>
+            <a:pPr/>
+            <a:r>
+              <a:t>AB Loop (res 31–36)</a:t>
+            </a:r>
+          </a:p>
+          <a:p>
+            <a:pPr/>
+            <a:r>
+              <a:t>Primary MMP active-site contact. AB 6 (13 aa insertion) achieved strongest selectivity signal, p = 0.0002.</a:t>
+            </a:r>
+          </a:p>
+          <a:p>
+            <a:pPr/>
+            <a:r>
+              <a:t>C Loop (res 63–68)</a:t>
+            </a:r>
+          </a:p>
+          <a:p>
+            <a:pPr/>
+            <a:r>
+              <a:t>Second primary contact loop. C 12 and C 15 both confirmed MMP9-selective. Up to 13 aa insertions tolerated.</a:t>
+            </a:r>
+          </a:p>
+          <a:p>
+            <a:pPr/>
+            <a:r>
+              <a:t>EF Loop (res 93–96)</a:t>
+            </a:r>
+          </a:p>
+          <a:p>
+            <a:pPr/>
+            <a:r>
+              <a:t>Secondary contact loop. 4 residues native. EF variants generated but selection concentrated on AB and C in this cycle.</a:t>
+            </a:r>
+          </a:p>
+        </p:txBody>
+      </p:sp>
+    </p:spTree>
+  </p:cSld>
+  <p:clrMapOvr>
+    <a:masterClrMapping/>
+  </p:clrMapOvr>
+</p:sld>
+</file>
+
+<file path=ppt/slides/slide60.xml><?xml version="1.0" encoding="utf-8"?>
+<p:sld xmlns:a="http://schemas.openxmlformats.org/drawingml/2006/main" xmlns:p="http://schemas.openxmlformats.org/presentationml/2006/main" xmlns:r="http://schemas.openxmlformats.org/officeDocument/2006/relationships">
+  <p:cSld>
+    <p:spTree>
+      <p:nvGrpSpPr>
+        <p:cNvPr id="1" name=""/>
+        <p:cNvGrpSpPr/>
+        <p:nvPr/>
+      </p:nvGrpSpPr>
+      <p:grpSpPr/>
+      <p:sp>
+        <p:nvSpPr>
+          <p:cNvPr id="2" name="Title 1"/>
+          <p:cNvSpPr>
+            <a:spLocks noGrp="1"/>
+          </p:cNvSpPr>
+          <p:nvPr>
+            <p:ph type="title"/>
+          </p:nvPr>
+        </p:nvSpPr>
+        <p:spPr/>
+        <p:txBody>
+          <a:bodyPr/>
+          <a:lstStyle/>
+          <a:p/>
+        </p:txBody>
+      </p:sp>
+      <p:sp>
+        <p:nvSpPr>
+          <p:cNvPr id="3" name="Content Placeholder 2"/>
+          <p:cNvSpPr>
+            <a:spLocks noGrp="1"/>
+          </p:cNvSpPr>
+          <p:nvPr>
+            <p:ph idx="1"/>
+          </p:nvPr>
+        </p:nvSpPr>
+        <p:spPr/>
+        <p:txBody>
+          <a:bodyPr wrap="square"/>
+          <a:lstStyle/>
+          <a:p/>
+          <a:p>
+            <a:pPr/>
+            <a:r>
+              <a:t>layout: default</a:t>
+            </a:r>
+          </a:p>
+          <a:p>
+            <a:pPr/>
+            <a:r>
+              <a:t>transition: fade-out</a:t>
+            </a:r>
+          </a:p>
+        </p:txBody>
+      </p:sp>
+    </p:spTree>
+  </p:cSld>
+  <p:clrMapOvr>
+    <a:masterClrMapping/>
+  </p:clrMapOvr>
+</p:sld>
+</file>
+
+<file path=ppt/slides/slide61.xml><?xml version="1.0" encoding="utf-8"?>
+<p:sld xmlns:a="http://schemas.openxmlformats.org/drawingml/2006/main" xmlns:p="http://schemas.openxmlformats.org/presentationml/2006/main" xmlns:r="http://schemas.openxmlformats.org/officeDocument/2006/relationships">
+  <p:cSld>
+    <p:spTree>
+      <p:nvGrpSpPr>
+        <p:cNvPr id="1" name=""/>
+        <p:cNvGrpSpPr/>
+        <p:nvPr/>
+      </p:nvGrpSpPr>
+      <p:grpSpPr/>
+      <p:sp>
+        <p:nvSpPr>
+          <p:cNvPr id="2" name="Title 1"/>
+          <p:cNvSpPr>
+            <a:spLocks noGrp="1"/>
+          </p:cNvSpPr>
+          <p:nvPr>
+            <p:ph type="title"/>
+          </p:nvPr>
+        </p:nvSpPr>
+        <p:spPr/>
+        <p:txBody>
+          <a:bodyPr/>
+          <a:lstStyle/>
+          <a:p>
+            <a:r>
+              <a:t>BCA Assay — ADAM10 Concentration Standardization (June 12\textsuperscript{th}, 2026)</a:t>
+            </a:r>
+          </a:p>
+        </p:txBody>
+      </p:sp>
+      <p:sp>
+        <p:nvSpPr>
+          <p:cNvPr id="3" name="Content Placeholder 2"/>
+          <p:cNvSpPr>
+            <a:spLocks noGrp="1"/>
+          </p:cNvSpPr>
+          <p:nvPr>
+            <p:ph idx="1"/>
+          </p:nvPr>
+        </p:nvSpPr>
+        <p:spPr/>
+        <p:txBody>
+          <a:bodyPr wrap="square"/>
+          <a:lstStyle/>
+          <a:p/>
+          <a:p>
+            <a:pPr/>
+            <a:r>
+              <a:t>Quantifying purified ADAM10 FPLC Fraction 6 for downstream binding trials.</a:t>
+            </a:r>
+          </a:p>
+          <a:p>
+            <a:pPr/>
+            <a:r>
+              <a:t>SpectraMax i3x Run</a:t>
+            </a:r>
+          </a:p>
+          <a:p>
+            <a:pPr/>
+            <a:r>
+              <a:t>Quadratic Fit ($R^2 = 0.9895$): Back-calculated neat, 1:2, and 1:5 dilutions yield a mean concentration of 205.46 μg/mL (~0.21 mg/mL).</a:t>
+            </a:r>
+          </a:p>
+          <a:p>
+            <a:pPr/>
+            <a:r>
+              <a:t>SPECTRAmax M5 Run</a:t>
+            </a:r>
+          </a:p>
+          <a:p>
+            <a:pPr/>
+            <a:r>
+              <a:t>Linear Fit ($R^2 = 0.9930$): Dilution adjusted values show a mean concentration of 193.89 μg/mL (~0.19 mg/mL).</a:t>
+            </a:r>
+          </a:p>
+          <a:p>
+            <a:pPr/>
+            <a:r>
+              <a:t>Standardized Concentration: Purified ADAM10 FPLC Fraction 6 concentration is standardized to 0.20 mg/mL for downstream display trials.</a:t>
+            </a:r>
+          </a:p>
+        </p:txBody>
+      </p:sp>
+    </p:spTree>
+  </p:cSld>
+  <p:clrMapOvr>
+    <a:masterClrMapping/>
+  </p:clrMapOvr>
+</p:sld>
+</file>
+
+<file path=ppt/slides/slide62.xml><?xml version="1.0" encoding="utf-8"?>
+<p:sld xmlns:a="http://schemas.openxmlformats.org/drawingml/2006/main" xmlns:p="http://schemas.openxmlformats.org/presentationml/2006/main" xmlns:r="http://schemas.openxmlformats.org/officeDocument/2006/relationships">
+  <p:cSld>
+    <p:spTree>
+      <p:nvGrpSpPr>
+        <p:cNvPr id="1" name=""/>
+        <p:cNvGrpSpPr/>
+        <p:nvPr/>
+      </p:nvGrpSpPr>
+      <p:grpSpPr/>
+      <p:sp>
+        <p:nvSpPr>
+          <p:cNvPr id="2" name="Title 1"/>
+          <p:cNvSpPr>
+            <a:spLocks noGrp="1"/>
+          </p:cNvSpPr>
+          <p:nvPr>
+            <p:ph type="title"/>
+          </p:nvPr>
+        </p:nvSpPr>
+        <p:spPr/>
+        <p:txBody>
+          <a:bodyPr/>
+          <a:lstStyle/>
+          <a:p/>
+        </p:txBody>
+      </p:sp>
+      <p:sp>
+        <p:nvSpPr>
+          <p:cNvPr id="3" name="Content Placeholder 2"/>
+          <p:cNvSpPr>
+            <a:spLocks noGrp="1"/>
+          </p:cNvSpPr>
+          <p:nvPr>
+            <p:ph idx="1"/>
+          </p:nvPr>
+        </p:nvSpPr>
+        <p:spPr/>
+        <p:txBody>
+          <a:bodyPr wrap="square"/>
+          <a:lstStyle/>
+          <a:p/>
+          <a:p>
+            <a:pPr/>
+            <a:r>
+              <a:t>layout: center</a:t>
+            </a:r>
+          </a:p>
+          <a:p>
+            <a:pPr/>
+            <a:r>
+              <a:t>class: text-center</a:t>
+            </a:r>
+          </a:p>
+        </p:txBody>
+      </p:sp>
+    </p:spTree>
+  </p:cSld>
+  <p:clrMapOvr>
+    <a:masterClrMapping/>
+  </p:clrMapOvr>
+</p:sld>
+</file>
+
+<file path=ppt/slides/slide63.xml><?xml version="1.0" encoding="utf-8"?>
+<p:sld xmlns:a="http://schemas.openxmlformats.org/drawingml/2006/main" xmlns:p="http://schemas.openxmlformats.org/presentationml/2006/main" xmlns:r="http://schemas.openxmlformats.org/officeDocument/2006/relationships">
+  <p:cSld>
+    <p:spTree>
+      <p:nvGrpSpPr>
+        <p:cNvPr id="1" name=""/>
+        <p:cNvGrpSpPr/>
+        <p:nvPr/>
+      </p:nvGrpSpPr>
+      <p:grpSpPr/>
+      <p:sp>
+        <p:nvSpPr>
+          <p:cNvPr id="2" name="Title 1"/>
+          <p:cNvSpPr>
+            <a:spLocks noGrp="1"/>
+          </p:cNvSpPr>
+          <p:nvPr>
+            <p:ph type="title"/>
+          </p:nvPr>
+        </p:nvSpPr>
+        <p:spPr/>
+        <p:txBody>
+          <a:bodyPr/>
+          <a:lstStyle/>
+          <a:p>
+            <a:r>
+              <a:t>Questions</a:t>
             </a:r>
           </a:p>
         </p:txBody>
@@ -4736,7 +8725,49 @@
               <a:defRPr b="1" sz="2400"/>
             </a:pPr>
             <a:r>
-              <a:t>Computational Design and Validation</a:t>
+              <a:t>De Novo Binder Generation — RFdiffusion to Flow Cytometry</a:t>
+            </a:r>
+          </a:p>
+          <a:p>
+            <a:pPr/>
+            <a:r>
+              <a:t>75%</a:t>
+            </a:r>
+          </a:p>
+          <a:p>
+            <a:pPr/>
+            <a:r>
+              <a:t>Positive Predictive Value (3/4)</a:t>
+            </a:r>
+          </a:p>
+          <a:p>
+            <a:pPr/>
+            <a:r>
+              <a:t>3.8×</a:t>
+            </a:r>
+          </a:p>
+          <a:p>
+            <a:pPr/>
+            <a:r>
+              <a:t>Peak Selectivity (AB 6)</a:t>
+            </a:r>
+          </a:p>
+          <a:p>
+            <a:pPr/>
+            <a:r>
+              <a:t>&gt;98%</a:t>
+            </a:r>
+          </a:p>
+          <a:p>
+            <a:pPr/>
+            <a:r>
+              <a:t>Candidate Reduction</a:t>
+            </a:r>
+          </a:p>
+          <a:p>
+            <a:pPr/>
+            <a:r>
+              <a:t>Repository: PhD-Research / Demonstrations / De_Novo_Binder_Generation</a:t>
             </a:r>
           </a:p>
         </p:txBody>
@@ -4839,7 +8870,7 @@
           <a:lstStyle/>
           <a:p>
             <a:r>
-              <a:t>RFdiffusion Loop Scaffolding</a:t>
+              <a:t>Full Pipeline Architecture</a:t>
             </a:r>
           </a:p>
         </p:txBody>
@@ -4862,43 +8893,151 @@
           <a:p>
             <a:pPr/>
             <a:r>
-              <a:t>Targeting variable surface loops on the TIMP3 scaffold.</a:t>
-            </a:r>
-          </a:p>
-          <a:p>
-            <a:pPr/>
-            <a:r>
-              <a:t>We utilized length-variable loop generation (8–24 residues) to optimize the interaction surface against ADAM10 and ADAM17 catalytic domains.</a:t>
-            </a:r>
-          </a:p>
-          <a:p>
-            <a:pPr/>
-            <a:r>
-              <a:t>Design Parameters</a:t>
-            </a:r>
-          </a:p>
-          <a:p>
-            <a:pPr/>
-            <a:r>
-              <a:t>Targets MMP / ADAM</a:t>
-            </a:r>
-          </a:p>
-          <a:p>
-            <a:pPr/>
-            <a:r>
-              <a:t>Lengths 8, 12, 16, 20, 24</a:t>
-            </a:r>
-          </a:p>
-          <a:p>
-            <a:pPr/>
-            <a:r>
-              <a:t>Noise 0.1 - 0.5</a:t>
-            </a:r>
-          </a:p>
-          <a:p>
-            <a:pPr/>
-            <a:r>
-              <a:t>Iterations 50</a:t>
+              <a:t>Six stages from backbone hallucination to experimentally validated selectivity.</a:t>
+            </a:r>
+          </a:p>
+          <a:p>
+            <a:pPr/>
+            <a:r>
+              <a:t>①</a:t>
+            </a:r>
+          </a:p>
+          <a:p>
+            <a:pPr/>
+            <a:r>
+              <a:t>RFdiffusion</a:t>
+            </a:r>
+          </a:p>
+          <a:p>
+            <a:pPr/>
+            <a:r>
+              <a:t>Loop backbone hallucinationAB / C / EF loops6–24 aa expansionsA30 GPU, ~20 hr/run</a:t>
+            </a:r>
+          </a:p>
+          <a:p>
+            <a:pPr/>
+            <a:r>
+              <a:t>→</a:t>
+            </a:r>
+          </a:p>
+          <a:p>
+            <a:pPr/>
+            <a:r>
+              <a:t>②</a:t>
+            </a:r>
+          </a:p>
+          <a:p>
+            <a:pPr/>
+            <a:r>
+              <a:t>ProteinMPNN</a:t>
+            </a:r>
+          </a:p>
+          <a:p>
+            <a:pPr/>
+            <a:r>
+              <a:t>1000 seqs/targetT=0.2, fixed scaffoldTop 10 per loopby log-likelihood</a:t>
+            </a:r>
+          </a:p>
+          <a:p>
+            <a:pPr/>
+            <a:r>
+              <a:t>→</a:t>
+            </a:r>
+          </a:p>
+          <a:p>
+            <a:pPr/>
+            <a:r>
+              <a:t>③</a:t>
+            </a:r>
+          </a:p>
+          <a:p>
+            <a:pPr/>
+            <a:r>
+              <a:t>AlphaFold3</a:t>
+            </a:r>
+          </a:p>
+          <a:p>
+            <a:pPr/>
+            <a:r>
+              <a:t>Batch co-folding5 targetsipTM / PAE / pLDDTloop &amp; interface</a:t>
+            </a:r>
+          </a:p>
+          <a:p>
+            <a:pPr/>
+            <a:r>
+              <a:t>→</a:t>
+            </a:r>
+          </a:p>
+          <a:p>
+            <a:pPr/>
+            <a:r>
+              <a:t>④</a:t>
+            </a:r>
+          </a:p>
+          <a:p>
+            <a:pPr/>
+            <a:r>
+              <a:t>T-Score Filter</a:t>
+            </a:r>
+          </a:p>
+          <a:p>
+            <a:pPr/>
+            <a:r>
+              <a:t>T &gt; 2.0, ≥2 metricsipTM ≥ 0.8213 of &gt;1000 pass&gt;98% reduction</a:t>
+            </a:r>
+          </a:p>
+          <a:p>
+            <a:pPr/>
+            <a:r>
+              <a:t>→</a:t>
+            </a:r>
+          </a:p>
+          <a:p>
+            <a:pPr/>
+            <a:r>
+              <a:t>⑤</a:t>
+            </a:r>
+          </a:p>
+          <a:p>
+            <a:pPr/>
+            <a:r>
+              <a:t>DNA Synthesis</a:t>
+            </a:r>
+          </a:p>
+          <a:p>
+            <a:pPr/>
+            <a:r>
+              <a:t>RE site screeningBsrGI, BamHI, BsaI13/13 passedTwist, Dec 2025</a:t>
+            </a:r>
+          </a:p>
+          <a:p>
+            <a:pPr/>
+            <a:r>
+              <a:t>→</a:t>
+            </a:r>
+          </a:p>
+          <a:p>
+            <a:pPr/>
+            <a:r>
+              <a:t>⑥</a:t>
+            </a:r>
+          </a:p>
+          <a:p>
+            <a:pPr/>
+            <a:r>
+              <a:t>Yeast Display</a:t>
+            </a:r>
+          </a:p>
+          <a:p>
+            <a:pPr/>
+            <a:r>
+              <a:t>FITC = expressionAPC = bindingBind Med (Expr+)ANOVA + Tukey-HSD</a:t>
+            </a:r>
+          </a:p>
+          <a:p>
+            <a:pPr/>
+            <a:r>
+              <a:t>Scaffold constraint: TIMP3 residues outside the three engineered loops are held fixed throughout stages ①–③. Only loop positions are hallucinated (①) or designed (②), ensuring the validated scaffold fold is preserved.</a:t>
             </a:r>
           </a:p>
         </p:txBody>

--- a/Demonstrations/Presentations/De_Novo_Binder_Generation/De_Novo_Binder_Skeleton.pptx
+++ b/Demonstrations/Presentations/De_Novo_Binder_Generation/De_Novo_Binder_Skeleton.pptx
@@ -68,6 +68,8 @@
     <p:sldId id="316" r:id="rId67"/>
     <p:sldId id="317" r:id="rId68"/>
     <p:sldId id="318" r:id="rId69"/>
+    <p:sldId id="319" r:id="rId70"/>
+    <p:sldId id="320" r:id="rId71"/>
   </p:sldIdLst>
   <p:sldSz cx="12191695" cy="6858000" type="screen4x3"/>
   <p:notesSz cx="6858000" cy="9144000"/>
@@ -8655,13 +8657,13 @@
           <a:p>
             <a:pPr/>
             <a:r>
-              <a:t>layout: center</a:t>
-            </a:r>
-          </a:p>
-          <a:p>
-            <a:pPr/>
-            <a:r>
-              <a:t>class: text-center</a:t>
+              <a:t>layout: default</a:t>
+            </a:r>
+          </a:p>
+          <a:p>
+            <a:pPr/>
+            <a:r>
+              <a:t>transition: fade-out</a:t>
             </a:r>
           </a:p>
         </p:txBody>
@@ -8675,6 +8677,432 @@
 </file>
 
 <file path=ppt/slides/slide63.xml><?xml version="1.0" encoding="utf-8"?>
+<p:sld xmlns:a="http://schemas.openxmlformats.org/drawingml/2006/main" xmlns:p="http://schemas.openxmlformats.org/presentationml/2006/main" xmlns:r="http://schemas.openxmlformats.org/officeDocument/2006/relationships">
+  <p:cSld>
+    <p:spTree>
+      <p:nvGrpSpPr>
+        <p:cNvPr id="1" name=""/>
+        <p:cNvGrpSpPr/>
+        <p:nvPr/>
+      </p:nvGrpSpPr>
+      <p:grpSpPr/>
+      <p:sp>
+        <p:nvSpPr>
+          <p:cNvPr id="2" name="Title 1"/>
+          <p:cNvSpPr>
+            <a:spLocks noGrp="1"/>
+          </p:cNvSpPr>
+          <p:nvPr>
+            <p:ph type="title"/>
+          </p:nvPr>
+        </p:nvSpPr>
+        <p:spPr/>
+        <p:txBody>
+          <a:bodyPr/>
+          <a:lstStyle/>
+          <a:p>
+            <a:r>
+              <a:t>Final Candidate Selection &amp; Loop Extraction (June 15\textsuperscript{th}, 2026)</a:t>
+            </a:r>
+          </a:p>
+        </p:txBody>
+      </p:sp>
+      <p:sp>
+        <p:nvSpPr>
+          <p:cNvPr id="3" name="Content Placeholder 2"/>
+          <p:cNvSpPr>
+            <a:spLocks noGrp="1"/>
+          </p:cNvSpPr>
+          <p:nvPr>
+            <p:ph idx="1"/>
+          </p:nvPr>
+        </p:nvSpPr>
+        <p:spPr/>
+        <p:txBody>
+          <a:bodyPr wrap="square"/>
+          <a:lstStyle/>
+          <a:p/>
+          <a:p>
+            <a:pPr/>
+            <a:r>
+              <a:t>Isolating TIMP3 variable loop regions for synthesis ordering.</a:t>
+            </a:r>
+          </a:p>
+          <a:p>
+            <a:pPr/>
+            <a:r>
+              <a:t>Loop Extraction Logic</a:t>
+            </a:r>
+          </a:p>
+          <a:p>
+            <a:pPr/>
+            <a:r>
+              <a:t>To prepare candidates for synthesis, native framework boundaries were defined in select_binders_to_order.py to automatically extract the variable regions:</a:t>
+            </a:r>
+          </a:p>
+          <a:p>
+            <a:pPr/>
+            <a:r>
+              <a:t>AB Loop: Between PREFIX and REGION2</a:t>
+            </a:r>
+          </a:p>
+          <a:p>
+            <a:pPr/>
+            <a:r>
+              <a:t>C Loop: Between REGION2 and REGION3</a:t>
+            </a:r>
+          </a:p>
+          <a:p>
+            <a:pPr/>
+            <a:r>
+              <a:t>EF Loop: Between REGION3 and SUFFIX</a:t>
+            </a:r>
+          </a:p>
+          <a:p>
+            <a:pPr/>
+            <a:r>
+              <a:t>Eliminates manual splicing errors and ensures precise boundary isolation.</a:t>
+            </a:r>
+          </a:p>
+          <a:p>
+            <a:pPr/>
+            <a:r>
+              <a:t>Priority Selection Summary</a:t>
+            </a:r>
+          </a:p>
+          <a:p>
+            <a:pPr/>
+            <a:r>
+              <a:t>Filtered the candidate pool of 39 designs down to 10 prioritized binders:</a:t>
+            </a:r>
+          </a:p>
+          <a:p>
+            <a:pPr/>
+            <a:r>
+              <a:t>MMP9: 4 candidates (top composite: 0.816)</a:t>
+            </a:r>
+          </a:p>
+          <a:p>
+            <a:pPr/>
+            <a:r>
+              <a:t>ADAM17: 5 candidates (top composite: 0.792)</a:t>
+            </a:r>
+          </a:p>
+          <a:p>
+            <a:pPr/>
+            <a:r>
+              <a:t>MMP2: 1 candidate (composite: 0.785)</a:t>
+            </a:r>
+          </a:p>
+          <a:p>
+            <a:pPr/>
+            <a:r>
+              <a:t>Gates: pTM &amp;ge; 0.70, framework RMSD &amp;le; 4.0 Å, target ipTM &amp;ge; 0.50.</a:t>
+            </a:r>
+          </a:p>
+          <a:p>
+            <a:pPr/>
+            <a:r>
+              <a:t>Top prioritized designs for synthesis</a:t>
+            </a:r>
+          </a:p>
+          <a:p>
+            <a:pPr/>
+            <a:r>
+              <a:t>Design ID</a:t>
+            </a:r>
+          </a:p>
+          <a:p>
+            <a:pPr/>
+            <a:r>
+              <a:t>Target</a:t>
+            </a:r>
+          </a:p>
+          <a:p>
+            <a:pPr/>
+            <a:r>
+              <a:t>AB Loop</a:t>
+            </a:r>
+          </a:p>
+          <a:p>
+            <a:pPr/>
+            <a:r>
+              <a:t>C Loop</a:t>
+            </a:r>
+          </a:p>
+          <a:p>
+            <a:pPr/>
+            <a:r>
+              <a:t>EF Loop</a:t>
+            </a:r>
+          </a:p>
+          <a:p>
+            <a:pPr/>
+            <a:r>
+              <a:t>Comp</a:t>
+            </a:r>
+          </a:p>
+          <a:p>
+            <a:pPr/>
+            <a:r>
+              <a:t>MMP9_it15_d13_s0</a:t>
+            </a:r>
+          </a:p>
+          <a:p>
+            <a:pPr/>
+            <a:r>
+              <a:t>MMP9</a:t>
+            </a:r>
+          </a:p>
+          <a:p>
+            <a:pPr/>
+            <a:r>
+              <a:t>HTNPDPRRGGE</a:t>
+            </a:r>
+          </a:p>
+          <a:p>
+            <a:pPr/>
+            <a:r>
+              <a:t>ELTAM</a:t>
+            </a:r>
+          </a:p>
+          <a:p>
+            <a:pPr/>
+            <a:r>
+              <a:t>RACD</a:t>
+            </a:r>
+          </a:p>
+          <a:p>
+            <a:pPr/>
+            <a:r>
+              <a:t>0.816</a:t>
+            </a:r>
+          </a:p>
+          <a:p>
+            <a:pPr/>
+            <a:r>
+              <a:t>MMP9_it15_d19_s0</a:t>
+            </a:r>
+          </a:p>
+          <a:p>
+            <a:pPr/>
+            <a:r>
+              <a:t>MMP9</a:t>
+            </a:r>
+          </a:p>
+          <a:p>
+            <a:pPr/>
+            <a:r>
+              <a:t>DSVTGGTPSKS</a:t>
+            </a:r>
+          </a:p>
+          <a:p>
+            <a:pPr/>
+            <a:r>
+              <a:t>ASSAL</a:t>
+            </a:r>
+          </a:p>
+          <a:p>
+            <a:pPr/>
+            <a:r>
+              <a:t>RACD</a:t>
+            </a:r>
+          </a:p>
+          <a:p>
+            <a:pPr/>
+            <a:r>
+              <a:t>0.798</a:t>
+            </a:r>
+          </a:p>
+          <a:p>
+            <a:pPr/>
+            <a:r>
+              <a:t>ADAM17_it33_d11_s0</a:t>
+            </a:r>
+          </a:p>
+          <a:p>
+            <a:pPr/>
+            <a:r>
+              <a:t>ADAM17</a:t>
+            </a:r>
+          </a:p>
+          <a:p>
+            <a:pPr/>
+            <a:r>
+              <a:t>EATIDGSPAKE</a:t>
+            </a:r>
+          </a:p>
+          <a:p>
+            <a:pPr/>
+            <a:r>
+              <a:t>ESGVYHGMPIG</a:t>
+            </a:r>
+          </a:p>
+          <a:p>
+            <a:pPr/>
+            <a:r>
+              <a:t>LGPCS</a:t>
+            </a:r>
+          </a:p>
+          <a:p>
+            <a:pPr/>
+            <a:r>
+              <a:t>0.792</a:t>
+            </a:r>
+          </a:p>
+          <a:p>
+            <a:pPr/>
+            <a:r>
+              <a:t>ADAM17_it31_d15_s0</a:t>
+            </a:r>
+          </a:p>
+          <a:p>
+            <a:pPr/>
+            <a:r>
+              <a:t>ADAM17</a:t>
+            </a:r>
+          </a:p>
+          <a:p>
+            <a:pPr/>
+            <a:r>
+              <a:t>DSPIPNTKD</a:t>
+            </a:r>
+          </a:p>
+          <a:p>
+            <a:pPr/>
+            <a:r>
+              <a:t>ESDYGSIA</a:t>
+            </a:r>
+          </a:p>
+          <a:p>
+            <a:pPr/>
+            <a:r>
+              <a:t>DACS</a:t>
+            </a:r>
+          </a:p>
+          <a:p>
+            <a:pPr/>
+            <a:r>
+              <a:t>0.786</a:t>
+            </a:r>
+          </a:p>
+          <a:p>
+            <a:pPr/>
+            <a:r>
+              <a:t>MMP2_it24_d15_s0</a:t>
+            </a:r>
+          </a:p>
+          <a:p>
+            <a:pPr/>
+            <a:r>
+              <a:t>MMP2</a:t>
+            </a:r>
+          </a:p>
+          <a:p>
+            <a:pPr/>
+            <a:r>
+              <a:t>KNVKDFFTGSMGDE</a:t>
+            </a:r>
+          </a:p>
+          <a:p>
+            <a:pPr/>
+            <a:r>
+              <a:t>ADSKFENGKSIG</a:t>
+            </a:r>
+          </a:p>
+          <a:p>
+            <a:pPr/>
+            <a:r>
+              <a:t>DLCS</a:t>
+            </a:r>
+          </a:p>
+          <a:p>
+            <a:pPr/>
+            <a:r>
+              <a:t>0.785</a:t>
+            </a:r>
+          </a:p>
+          <a:p>
+            <a:pPr/>
+            <a:r>
+              <a:t>Full list exported to order_list.csv (Local/iterative_refinement/ordering/).</a:t>
+            </a:r>
+          </a:p>
+        </p:txBody>
+      </p:sp>
+    </p:spTree>
+  </p:cSld>
+  <p:clrMapOvr>
+    <a:masterClrMapping/>
+  </p:clrMapOvr>
+</p:sld>
+</file>
+
+<file path=ppt/slides/slide64.xml><?xml version="1.0" encoding="utf-8"?>
+<p:sld xmlns:a="http://schemas.openxmlformats.org/drawingml/2006/main" xmlns:p="http://schemas.openxmlformats.org/presentationml/2006/main" xmlns:r="http://schemas.openxmlformats.org/officeDocument/2006/relationships">
+  <p:cSld>
+    <p:spTree>
+      <p:nvGrpSpPr>
+        <p:cNvPr id="1" name=""/>
+        <p:cNvGrpSpPr/>
+        <p:nvPr/>
+      </p:nvGrpSpPr>
+      <p:grpSpPr/>
+      <p:sp>
+        <p:nvSpPr>
+          <p:cNvPr id="2" name="Title 1"/>
+          <p:cNvSpPr>
+            <a:spLocks noGrp="1"/>
+          </p:cNvSpPr>
+          <p:nvPr>
+            <p:ph type="title"/>
+          </p:nvPr>
+        </p:nvSpPr>
+        <p:spPr/>
+        <p:txBody>
+          <a:bodyPr/>
+          <a:lstStyle/>
+          <a:p/>
+        </p:txBody>
+      </p:sp>
+      <p:sp>
+        <p:nvSpPr>
+          <p:cNvPr id="3" name="Content Placeholder 2"/>
+          <p:cNvSpPr>
+            <a:spLocks noGrp="1"/>
+          </p:cNvSpPr>
+          <p:nvPr>
+            <p:ph idx="1"/>
+          </p:nvPr>
+        </p:nvSpPr>
+        <p:spPr/>
+        <p:txBody>
+          <a:bodyPr wrap="square"/>
+          <a:lstStyle/>
+          <a:p/>
+          <a:p>
+            <a:pPr/>
+            <a:r>
+              <a:t>layout: center</a:t>
+            </a:r>
+          </a:p>
+          <a:p>
+            <a:pPr/>
+            <a:r>
+              <a:t>class: text-center</a:t>
+            </a:r>
+          </a:p>
+        </p:txBody>
+      </p:sp>
+    </p:spTree>
+  </p:cSld>
+  <p:clrMapOvr>
+    <a:masterClrMapping/>
+  </p:clrMapOvr>
+</p:sld>
+</file>
+
+<file path=ppt/slides/slide65.xml><?xml version="1.0" encoding="utf-8"?>
 <p:sld xmlns:a="http://schemas.openxmlformats.org/drawingml/2006/main" xmlns:p="http://schemas.openxmlformats.org/presentationml/2006/main" xmlns:r="http://schemas.openxmlformats.org/officeDocument/2006/relationships">
   <p:cSld>
     <p:spTree>
